--- a/docs/KICT_Bmaps_Inframon_연구개발_7p_vF.pptx
+++ b/docs/KICT_Bmaps_Inframon_연구개발_7p_vF.pptx
@@ -19435,7 +19435,7 @@
                 <a:ea typeface="Paperlogy 7 Bold" pitchFamily="34" charset="-122"/>
                 <a:cs typeface="Paperlogy 7 Bold" pitchFamily="34" charset="-120"/>
               </a:rPr>
-              <a:t>KICT 협의 요청</a:t>
+              <a:t>KICT 자료 요청</a:t>
             </a:r>
             <a:endParaRPr lang="en-US" sz="1150" dirty="0"/>
           </a:p>
@@ -19538,7 +19538,7 @@
                 <a:ea typeface="Paperlogy 7 Bold" pitchFamily="34" charset="-122"/>
                 <a:cs typeface="Paperlogy 7 Bold" pitchFamily="34" charset="-120"/>
               </a:rPr>
-              <a:t>시범 교량 선정</a:t>
+              <a:t>교량 대장 제원</a:t>
             </a:r>
             <a:endParaRPr lang="en-US" sz="1100" dirty="0"/>
           </a:p>
@@ -19555,7 +19555,7 @@
                 <a:ea typeface="Paperlogy 5 Medium" pitchFamily="34" charset="-122"/>
                 <a:cs typeface="Paperlogy 5 Medium" pitchFamily="34" charset="-120"/>
               </a:rPr>
-              <a:t>계측 자료가 있는 곳부터</a:t>
+              <a:t>연장 · 폭 · 경간 · 형하고</a:t>
             </a:r>
             <a:endParaRPr lang="en-US" sz="1100" dirty="0"/>
           </a:p>
@@ -19658,7 +19658,7 @@
                 <a:ea typeface="Paperlogy 7 Bold" pitchFamily="34" charset="-122"/>
                 <a:cs typeface="Paperlogy 7 Bold" pitchFamily="34" charset="-120"/>
               </a:rPr>
-              <a:t>화면 필드 매핑</a:t>
+              <a:t>교량관리번호</a:t>
             </a:r>
             <a:endParaRPr lang="en-US" sz="1100" dirty="0"/>
           </a:p>
@@ -19675,7 +19675,7 @@
                 <a:ea typeface="Paperlogy 5 Medium" pitchFamily="34" charset="-122"/>
                 <a:cs typeface="Paperlogy 5 Medium" pitchFamily="34" charset="-120"/>
               </a:rPr>
-              <a:t>교량관리번호 · B-Maps 표시 항목</a:t>
+              <a:t>대장 좌표와 함께</a:t>
             </a:r>
             <a:endParaRPr lang="en-US" sz="1100" dirty="0"/>
           </a:p>
@@ -19778,7 +19778,7 @@
                 <a:ea typeface="Paperlogy 7 Bold" pitchFamily="34" charset="-122"/>
                 <a:cs typeface="Paperlogy 7 Bold" pitchFamily="34" charset="-120"/>
               </a:rPr>
-              <a:t>운영 규칙 합의</a:t>
+              <a:t>보유 IFC 모델</a:t>
             </a:r>
             <a:endParaRPr lang="en-US" sz="1100" dirty="0"/>
           </a:p>
@@ -19795,7 +19795,7 @@
                 <a:ea typeface="Paperlogy 5 Medium" pitchFamily="34" charset="-122"/>
                 <a:cs typeface="Paperlogy 5 Medium" pitchFamily="34" charset="-120"/>
               </a:rPr>
-              <a:t>갱신 주기 · 경보 임계 · 인증</a:t>
+              <a:t>있는 교량만이라도</a:t>
             </a:r>
             <a:endParaRPr lang="en-US" sz="1100" dirty="0"/>
           </a:p>
@@ -19898,7 +19898,7 @@
                 <a:ea typeface="Paperlogy 7 Bold" pitchFamily="34" charset="-122"/>
                 <a:cs typeface="Paperlogy 7 Bold" pitchFamily="34" charset="-120"/>
               </a:rPr>
-              <a:t>검증 자료 공유</a:t>
+              <a:t>준공 · 보수 이력</a:t>
             </a:r>
             <a:endParaRPr lang="en-US" sz="1100" dirty="0"/>
           </a:p>
@@ -19915,7 +19915,7 @@
                 <a:ea typeface="Paperlogy 5 Medium" pitchFamily="34" charset="-122"/>
                 <a:cs typeface="Paperlogy 5 Medium" pitchFamily="34" charset="-120"/>
               </a:rPr>
-              <a:t>계측 위치 · 실 제원 · 점검 이력</a:t>
+              <a:t>연도와 일자만</a:t>
             </a:r>
             <a:endParaRPr lang="en-US" sz="1100" dirty="0"/>
           </a:p>

--- a/docs/KICT_Bmaps_Inframon_연구개발_7p_vF.pptx
+++ b/docs/KICT_Bmaps_Inframon_연구개발_7p_vF.pptx
@@ -4606,6 +4606,10 @@
             <a:prstDash val="solid"/>
           </a:ln>
         </p:spPr>
+        <p:txBody>
+          <a:bodyPr/>
+          <a:p/>
+        </p:txBody>
       </p:sp>
       <p:sp>
         <p:nvSpPr>
@@ -4672,6 +4676,10 @@
             <a:prstDash val="solid"/>
           </a:ln>
         </p:spPr>
+        <p:txBody>
+          <a:bodyPr/>
+          <a:p/>
+        </p:txBody>
       </p:sp>
       <p:sp>
         <p:nvSpPr>
@@ -4699,6 +4707,10 @@
             <a:prstDash val="solid"/>
           </a:ln>
         </p:spPr>
+        <p:txBody>
+          <a:bodyPr/>
+          <a:p/>
+        </p:txBody>
       </p:sp>
       <p:sp>
         <p:nvSpPr>
@@ -4892,6 +4904,10 @@
             <a:prstDash val="solid"/>
           </a:ln>
         </p:spPr>
+        <p:txBody>
+          <a:bodyPr/>
+          <a:p/>
+        </p:txBody>
       </p:sp>
       <p:sp>
         <p:nvSpPr>
@@ -4919,6 +4935,10 @@
             <a:prstDash val="solid"/>
           </a:ln>
         </p:spPr>
+        <p:txBody>
+          <a:bodyPr/>
+          <a:p/>
+        </p:txBody>
       </p:sp>
       <p:sp>
         <p:nvSpPr>
@@ -5112,6 +5132,10 @@
             <a:prstDash val="solid"/>
           </a:ln>
         </p:spPr>
+        <p:txBody>
+          <a:bodyPr/>
+          <a:p/>
+        </p:txBody>
       </p:sp>
       <p:sp>
         <p:nvSpPr>
@@ -5139,6 +5163,10 @@
             <a:prstDash val="solid"/>
           </a:ln>
         </p:spPr>
+        <p:txBody>
+          <a:bodyPr/>
+          <a:p/>
+        </p:txBody>
       </p:sp>
       <p:sp>
         <p:nvSpPr>
@@ -5332,6 +5360,10 @@
             <a:prstDash val="solid"/>
           </a:ln>
         </p:spPr>
+        <p:txBody>
+          <a:bodyPr/>
+          <a:p/>
+        </p:txBody>
       </p:sp>
       <p:sp>
         <p:nvSpPr>
@@ -5451,6 +5483,10 @@
             <a:prstDash val="solid"/>
           </a:ln>
         </p:spPr>
+        <p:txBody>
+          <a:bodyPr/>
+          <a:p/>
+        </p:txBody>
       </p:sp>
       <p:sp>
         <p:nvSpPr>
@@ -5570,6 +5606,10 @@
             <a:prstDash val="solid"/>
           </a:ln>
         </p:spPr>
+        <p:txBody>
+          <a:bodyPr/>
+          <a:p/>
+        </p:txBody>
       </p:sp>
       <p:sp>
         <p:nvSpPr>
@@ -5689,6 +5729,10 @@
             <a:prstDash val="solid"/>
           </a:ln>
         </p:spPr>
+        <p:txBody>
+          <a:bodyPr/>
+          <a:p/>
+        </p:txBody>
       </p:sp>
       <p:sp>
         <p:nvSpPr>
@@ -8445,7 +8489,7 @@
                           <a:ea typeface="Paperlogy 7 Bold" pitchFamily="34" charset="-122"/>
                           <a:cs typeface="Paperlogy 7 Bold" pitchFamily="34" charset="-120"/>
                         </a:rPr>
-                        <a:t>좌표 1개로 수집–처리–교면 변위 시계열까지 자동</a:t>
+                        <a:t>수집–처리–교면 변위 시계열까지 자동</a:t>
                       </a:r>
                       <a:endParaRPr lang="en-US" sz="1100" dirty="0">
                         <a:latin typeface="Paperlogy 7 Bold" charset="0"/>
@@ -8792,7 +8836,7 @@
                           <a:ea typeface="Paperlogy 5 Medium" pitchFamily="34" charset="-122"/>
                           <a:cs typeface="Paperlogy 5 Medium" pitchFamily="34" charset="-120"/>
                         </a:rPr>
-                        <a:t>실측 건강 교량으로 기준 재설정 → 잠정 해제</a:t>
+                        <a:t>안전등급 양호 교량의 실측값으로 기준 확정</a:t>
                       </a:r>
                       <a:endParaRPr lang="en-US" sz="1100" dirty="0">
                         <a:latin typeface="Paperlogy 5 Medium" charset="0"/>
@@ -9712,6 +9756,10 @@
             <a:prstDash val="solid"/>
           </a:ln>
         </p:spPr>
+        <p:txBody>
+          <a:bodyPr/>
+          <a:p/>
+        </p:txBody>
       </p:sp>
       <p:sp>
         <p:nvSpPr>
@@ -9746,7 +9794,7 @@
                 <a:ea typeface="Paperlogy 7 Bold" pitchFamily="34" charset="-122"/>
                 <a:cs typeface="Paperlogy 7 Bold" pitchFamily="34" charset="-120"/>
               </a:rPr>
-              <a:t>Inframon 은 좌표 하나로 위성 → 변위 → AI 해석 → 트윈 → B-Maps 까지 잇는 6단계 파이프라인이다</a:t>
+              <a:t>위성 영상에서 변위를 뽑아 AI 로 해석하고, 트윈으로 만들어 B-Maps 에 넘기는 6단계다</a:t>
             </a:r>
             <a:endParaRPr lang="en-US" sz="1450" dirty="0"/>
           </a:p>
@@ -9778,6 +9826,10 @@
             <a:prstDash val="solid"/>
           </a:ln>
         </p:spPr>
+        <p:txBody>
+          <a:bodyPr/>
+          <a:p/>
+        </p:txBody>
       </p:sp>
       <p:sp>
         <p:nvSpPr>
@@ -9805,6 +9857,10 @@
             <a:prstDash val="solid"/>
           </a:ln>
         </p:spPr>
+        <p:txBody>
+          <a:bodyPr/>
+          <a:p/>
+        </p:txBody>
       </p:sp>
       <p:sp>
         <p:nvSpPr>
@@ -9830,6 +9886,10 @@
             <a:prstDash val="solid"/>
           </a:ln>
         </p:spPr>
+        <p:txBody>
+          <a:bodyPr/>
+          <a:p/>
+        </p:txBody>
       </p:sp>
       <p:sp>
         <p:nvSpPr>
@@ -9864,7 +9924,7 @@
                 <a:ea typeface="Paperlogy 7 Bold" pitchFamily="34" charset="-122"/>
                 <a:cs typeface="Paperlogy 7 Bold" pitchFamily="34" charset="-120"/>
               </a:rPr>
-              <a:t>⓪ 교량·영상 선별</a:t>
+              <a:t>① 교량·영상 선별</a:t>
             </a:r>
             <a:endParaRPr lang="en-US" sz="1200" dirty="0"/>
           </a:p>
@@ -9988,6 +10048,10 @@
             <a:prstDash val="solid"/>
           </a:ln>
         </p:spPr>
+        <p:txBody>
+          <a:bodyPr/>
+          <a:p/>
+        </p:txBody>
       </p:sp>
       <p:sp>
         <p:nvSpPr>
@@ -10015,6 +10079,10 @@
             <a:prstDash val="solid"/>
           </a:ln>
         </p:spPr>
+        <p:txBody>
+          <a:bodyPr/>
+          <a:p/>
+        </p:txBody>
       </p:sp>
       <p:sp>
         <p:nvSpPr>
@@ -10042,6 +10110,10 @@
             <a:prstDash val="solid"/>
           </a:ln>
         </p:spPr>
+        <p:txBody>
+          <a:bodyPr/>
+          <a:p/>
+        </p:txBody>
       </p:sp>
       <p:sp>
         <p:nvSpPr>
@@ -10067,6 +10139,10 @@
             <a:prstDash val="solid"/>
           </a:ln>
         </p:spPr>
+        <p:txBody>
+          <a:bodyPr/>
+          <a:p/>
+        </p:txBody>
       </p:sp>
       <p:sp>
         <p:nvSpPr>
@@ -10101,7 +10177,7 @@
                 <a:ea typeface="Paperlogy 7 Bold" pitchFamily="34" charset="-122"/>
                 <a:cs typeface="Paperlogy 7 Bold" pitchFamily="34" charset="-120"/>
               </a:rPr>
-              <a:t>① InSAR 처리</a:t>
+              <a:t>② InSAR 처리</a:t>
             </a:r>
             <a:endParaRPr lang="en-US" sz="1200" dirty="0"/>
           </a:p>
@@ -10225,6 +10301,10 @@
             <a:prstDash val="solid"/>
           </a:ln>
         </p:spPr>
+        <p:txBody>
+          <a:bodyPr/>
+          <a:p/>
+        </p:txBody>
       </p:sp>
       <p:sp>
         <p:nvSpPr>
@@ -10252,6 +10332,10 @@
             <a:prstDash val="solid"/>
           </a:ln>
         </p:spPr>
+        <p:txBody>
+          <a:bodyPr/>
+          <a:p/>
+        </p:txBody>
       </p:sp>
       <p:sp>
         <p:nvSpPr>
@@ -10279,6 +10363,10 @@
             <a:prstDash val="solid"/>
           </a:ln>
         </p:spPr>
+        <p:txBody>
+          <a:bodyPr/>
+          <a:p/>
+        </p:txBody>
       </p:sp>
       <p:sp>
         <p:nvSpPr>
@@ -10304,6 +10392,10 @@
             <a:prstDash val="solid"/>
           </a:ln>
         </p:spPr>
+        <p:txBody>
+          <a:bodyPr/>
+          <a:p/>
+        </p:txBody>
       </p:sp>
       <p:sp>
         <p:nvSpPr>
@@ -10338,7 +10430,7 @@
                 <a:ea typeface="Paperlogy 7 Bold" pitchFamily="34" charset="-122"/>
                 <a:cs typeface="Paperlogy 7 Bold" pitchFamily="34" charset="-120"/>
               </a:rPr>
-              <a:t>② 교면 측점 정합</a:t>
+              <a:t>③ 교면 측점 정합</a:t>
             </a:r>
             <a:endParaRPr lang="en-US" sz="1200" dirty="0"/>
           </a:p>
@@ -10462,6 +10554,10 @@
             <a:prstDash val="solid"/>
           </a:ln>
         </p:spPr>
+        <p:txBody>
+          <a:bodyPr/>
+          <a:p/>
+        </p:txBody>
       </p:sp>
       <p:sp>
         <p:nvSpPr>
@@ -10489,6 +10585,10 @@
             <a:prstDash val="solid"/>
           </a:ln>
         </p:spPr>
+        <p:txBody>
+          <a:bodyPr/>
+          <a:p/>
+        </p:txBody>
       </p:sp>
       <p:sp>
         <p:nvSpPr>
@@ -10516,6 +10616,10 @@
             <a:prstDash val="solid"/>
           </a:ln>
         </p:spPr>
+        <p:txBody>
+          <a:bodyPr/>
+          <a:p/>
+        </p:txBody>
       </p:sp>
       <p:sp>
         <p:nvSpPr>
@@ -10541,6 +10645,10 @@
             <a:prstDash val="solid"/>
           </a:ln>
         </p:spPr>
+        <p:txBody>
+          <a:bodyPr/>
+          <a:p/>
+        </p:txBody>
       </p:sp>
       <p:sp>
         <p:nvSpPr>
@@ -10575,7 +10683,7 @@
                 <a:ea typeface="Paperlogy 7 Bold" pitchFamily="34" charset="-122"/>
                 <a:cs typeface="Paperlogy 7 Bold" pitchFamily="34" charset="-120"/>
               </a:rPr>
-              <a:t>③ PINN 역산</a:t>
+              <a:t>④ PINN 역산</a:t>
             </a:r>
             <a:endParaRPr lang="en-US" sz="1200" dirty="0"/>
           </a:p>
@@ -10699,6 +10807,10 @@
             <a:prstDash val="solid"/>
           </a:ln>
         </p:spPr>
+        <p:txBody>
+          <a:bodyPr/>
+          <a:p/>
+        </p:txBody>
       </p:sp>
       <p:sp>
         <p:nvSpPr>
@@ -10726,6 +10838,10 @@
             <a:prstDash val="solid"/>
           </a:ln>
         </p:spPr>
+        <p:txBody>
+          <a:bodyPr/>
+          <a:p/>
+        </p:txBody>
       </p:sp>
       <p:sp>
         <p:nvSpPr>
@@ -10753,6 +10869,10 @@
             <a:prstDash val="solid"/>
           </a:ln>
         </p:spPr>
+        <p:txBody>
+          <a:bodyPr/>
+          <a:p/>
+        </p:txBody>
       </p:sp>
       <p:sp>
         <p:nvSpPr>
@@ -10778,6 +10898,10 @@
             <a:prstDash val="solid"/>
           </a:ln>
         </p:spPr>
+        <p:txBody>
+          <a:bodyPr/>
+          <a:p/>
+        </p:txBody>
       </p:sp>
       <p:sp>
         <p:nvSpPr>
@@ -10812,7 +10936,7 @@
                 <a:ea typeface="Paperlogy 7 Bold" pitchFamily="34" charset="-122"/>
                 <a:cs typeface="Paperlogy 7 Bold" pitchFamily="34" charset="-120"/>
               </a:rPr>
-              <a:t>④ 위험도 평가</a:t>
+              <a:t>⑤ 위험도 평가</a:t>
             </a:r>
             <a:endParaRPr lang="en-US" sz="1200" dirty="0"/>
           </a:p>
@@ -10936,6 +11060,10 @@
             <a:prstDash val="solid"/>
           </a:ln>
         </p:spPr>
+        <p:txBody>
+          <a:bodyPr/>
+          <a:p/>
+        </p:txBody>
       </p:sp>
       <p:sp>
         <p:nvSpPr>
@@ -10963,6 +11091,10 @@
             <a:prstDash val="solid"/>
           </a:ln>
         </p:spPr>
+        <p:txBody>
+          <a:bodyPr/>
+          <a:p/>
+        </p:txBody>
       </p:sp>
       <p:sp>
         <p:nvSpPr>
@@ -10990,6 +11122,10 @@
             <a:prstDash val="solid"/>
           </a:ln>
         </p:spPr>
+        <p:txBody>
+          <a:bodyPr/>
+          <a:p/>
+        </p:txBody>
       </p:sp>
       <p:sp>
         <p:nvSpPr>
@@ -11015,6 +11151,10 @@
             <a:prstDash val="solid"/>
           </a:ln>
         </p:spPr>
+        <p:txBody>
+          <a:bodyPr/>
+          <a:p/>
+        </p:txBody>
       </p:sp>
       <p:sp>
         <p:nvSpPr>
@@ -11049,7 +11189,7 @@
                 <a:ea typeface="Paperlogy 7 Bold" pitchFamily="34" charset="-122"/>
                 <a:cs typeface="Paperlogy 7 Bold" pitchFamily="34" charset="-120"/>
               </a:rPr>
-              <a:t>⑤ 산출 · 연동</a:t>
+              <a:t>⑥ 산출 · 연동</a:t>
             </a:r>
             <a:endParaRPr lang="en-US" sz="1200" dirty="0"/>
           </a:p>
@@ -11175,6 +11315,10 @@
             <a:prstDash val="solid"/>
           </a:ln>
         </p:spPr>
+        <p:txBody>
+          <a:bodyPr/>
+          <a:p/>
+        </p:txBody>
       </p:sp>
       <p:sp>
         <p:nvSpPr>
@@ -11202,6 +11346,10 @@
             <a:prstDash val="solid"/>
           </a:ln>
         </p:spPr>
+        <p:txBody>
+          <a:bodyPr/>
+          <a:p/>
+        </p:txBody>
       </p:sp>
       <p:sp>
         <p:nvSpPr>
@@ -11268,6 +11416,10 @@
             <a:prstDash val="solid"/>
           </a:ln>
         </p:spPr>
+        <p:txBody>
+          <a:bodyPr/>
+          <a:p/>
+        </p:txBody>
       </p:sp>
       <p:sp>
         <p:nvSpPr>
@@ -11305,7 +11457,7 @@
                 <a:ea typeface="Paperlogy 7 Bold" pitchFamily="34" charset="-122"/>
                 <a:cs typeface="Paperlogy 7 Bold" pitchFamily="34" charset="-120"/>
               </a:rPr>
-              <a:t>좌표 1개 실행</a:t>
+              <a:t>같은 절차로</a:t>
             </a:r>
             <a:endParaRPr lang="en-US" sz="1100" dirty="0"/>
           </a:p>
@@ -11325,7 +11477,7 @@
                 <a:ea typeface="Paperlogy 5 Medium" pitchFamily="34" charset="-122"/>
                 <a:cs typeface="Paperlogy 5 Medium" pitchFamily="34" charset="-120"/>
               </a:rPr>
-              <a:t>교량을 바꿔도 코드 수정이 없다</a:t>
+              <a:t>교량이 바뀌어도 고칠 것이 없다</a:t>
             </a:r>
             <a:endParaRPr lang="en-US" sz="1100" dirty="0"/>
           </a:p>
@@ -11357,6 +11509,10 @@
             <a:prstDash val="solid"/>
           </a:ln>
         </p:spPr>
+        <p:txBody>
+          <a:bodyPr/>
+          <a:p/>
+        </p:txBody>
       </p:sp>
       <p:sp>
         <p:nvSpPr>
@@ -11446,6 +11602,10 @@
             <a:prstDash val="solid"/>
           </a:ln>
         </p:spPr>
+        <p:txBody>
+          <a:bodyPr/>
+          <a:p/>
+        </p:txBody>
       </p:sp>
       <p:sp>
         <p:nvSpPr>
@@ -11535,6 +11695,10 @@
             <a:prstDash val="solid"/>
           </a:ln>
         </p:spPr>
+        <p:txBody>
+          <a:bodyPr/>
+          <a:p/>
+        </p:txBody>
       </p:sp>
       <p:sp>
         <p:nvSpPr>
@@ -11624,6 +11788,10 @@
             <a:prstDash val="solid"/>
           </a:ln>
         </p:spPr>
+        <p:txBody>
+          <a:bodyPr/>
+          <a:p/>
+        </p:txBody>
       </p:sp>
       <p:sp>
         <p:nvSpPr>
@@ -11658,7 +11826,7 @@
                 <a:ea typeface="Paperlogy 7 Bold" pitchFamily="34" charset="-122"/>
                 <a:cs typeface="Paperlogy 7 Bold" pitchFamily="34" charset="-120"/>
               </a:rPr>
-              <a:t>51</a:t>
+              <a:t>6</a:t>
             </a:r>
             <a:r>
               <a:rPr lang="en-US" sz="1200" dirty="0">
@@ -11669,7 +11837,7 @@
                 <a:ea typeface="Paperlogy 7 Bold" pitchFamily="34" charset="-122"/>
                 <a:cs typeface="Paperlogy 7 Bold" pitchFamily="34" charset="-120"/>
               </a:rPr>
-              <a:t>  장면</a:t>
+              <a:t>  단계</a:t>
             </a:r>
             <a:endParaRPr lang="en-US" sz="1100" dirty="0"/>
           </a:p>
@@ -11711,7 +11879,7 @@
                 <a:ea typeface="Paperlogy 5 Medium" pitchFamily="34" charset="-122"/>
                 <a:cs typeface="Paperlogy 5 Medium" pitchFamily="34" charset="-120"/>
               </a:rPr>
-              <a:t>실제 Sentinel-1 영상</a:t>
+              <a:t>영상 고르기부터 B-Maps 전달까지</a:t>
             </a:r>
             <a:endParaRPr lang="en-US" sz="1000" dirty="0"/>
           </a:p>
@@ -11743,6 +11911,10 @@
             <a:prstDash val="solid"/>
           </a:ln>
         </p:spPr>
+        <p:txBody>
+          <a:bodyPr/>
+          <a:p/>
+        </p:txBody>
       </p:sp>
       <p:sp>
         <p:nvSpPr>
@@ -11777,7 +11949,7 @@
                 <a:ea typeface="Paperlogy 7 Bold" pitchFamily="34" charset="-122"/>
                 <a:cs typeface="Paperlogy 7 Bold" pitchFamily="34" charset="-120"/>
               </a:rPr>
-              <a:t>23</a:t>
+              <a:t>1</a:t>
             </a:r>
             <a:r>
               <a:rPr lang="en-US" sz="1200" dirty="0">
@@ -11788,7 +11960,7 @@
                 <a:ea typeface="Paperlogy 7 Bold" pitchFamily="34" charset="-122"/>
                 <a:cs typeface="Paperlogy 7 Bold" pitchFamily="34" charset="-120"/>
               </a:rPr>
-              <a:t>  개소</a:t>
+              <a:t>  개</a:t>
             </a:r>
             <a:endParaRPr lang="en-US" sz="1100" dirty="0"/>
           </a:p>
@@ -11830,7 +12002,7 @@
                 <a:ea typeface="Paperlogy 5 Medium" pitchFamily="34" charset="-122"/>
                 <a:cs typeface="Paperlogy 5 Medium" pitchFamily="34" charset="-120"/>
               </a:rPr>
-              <a:t>전 과정 시범 처리 교량</a:t>
+              <a:t>넣는 것은 좌표뿐</a:t>
             </a:r>
             <a:endParaRPr lang="en-US" sz="1000" dirty="0"/>
           </a:p>
@@ -11862,6 +12034,10 @@
             <a:prstDash val="solid"/>
           </a:ln>
         </p:spPr>
+        <p:txBody>
+          <a:bodyPr/>
+          <a:p/>
+        </p:txBody>
       </p:sp>
       <p:sp>
         <p:nvSpPr>
@@ -11896,7 +12072,7 @@
                 <a:ea typeface="Paperlogy 7 Bold" pitchFamily="34" charset="-122"/>
                 <a:cs typeface="Paperlogy 7 Bold" pitchFamily="34" charset="-120"/>
               </a:rPr>
-              <a:t>16</a:t>
+              <a:t>12</a:t>
             </a:r>
             <a:r>
               <a:rPr lang="en-US" sz="1200" dirty="0">
@@ -11907,7 +12083,7 @@
                 <a:ea typeface="Paperlogy 7 Bold" pitchFamily="34" charset="-122"/>
                 <a:cs typeface="Paperlogy 7 Bold" pitchFamily="34" charset="-120"/>
               </a:rPr>
-              <a:t>  개소</a:t>
+              <a:t>  일</a:t>
             </a:r>
             <a:endParaRPr lang="en-US" sz="1100" dirty="0"/>
           </a:p>
@@ -11949,7 +12125,7 @@
                 <a:ea typeface="Paperlogy 5 Medium" pitchFamily="34" charset="-122"/>
                 <a:cs typeface="Paperlogy 5 Medium" pitchFamily="34" charset="-120"/>
               </a:rPr>
-              <a:t>한강 교량 트윈 시범</a:t>
+              <a:t>위성이 다시 찍는 주기</a:t>
             </a:r>
             <a:endParaRPr lang="en-US" sz="1000" dirty="0"/>
           </a:p>
@@ -11981,6 +12157,10 @@
             <a:prstDash val="solid"/>
           </a:ln>
         </p:spPr>
+        <p:txBody>
+          <a:bodyPr/>
+          <a:p/>
+        </p:txBody>
       </p:sp>
       <p:sp>
         <p:nvSpPr>
@@ -12015,7 +12195,7 @@
                 <a:ea typeface="Paperlogy 7 Bold" pitchFamily="34" charset="-122"/>
                 <a:cs typeface="Paperlogy 7 Bold" pitchFamily="34" charset="-120"/>
               </a:rPr>
-              <a:t>12</a:t>
+              <a:t>0</a:t>
             </a:r>
             <a:r>
               <a:rPr lang="en-US" sz="1200" dirty="0">
@@ -12068,7 +12248,7 @@
                 <a:ea typeface="Paperlogy 5 Medium" pitchFamily="34" charset="-122"/>
                 <a:cs typeface="Paperlogy 5 Medium" pitchFamily="34" charset="-120"/>
               </a:rPr>
-              <a:t>B-Maps REST 엔드포인트</a:t>
+              <a:t>교량에 다는 장비</a:t>
             </a:r>
             <a:endParaRPr lang="en-US" sz="1000" dirty="0"/>
           </a:p>
@@ -12413,7 +12593,7 @@
                 <a:ea typeface="Paperlogy 7 Bold" pitchFamily="34" charset="-122"/>
                 <a:cs typeface="Paperlogy 7 Bold" pitchFamily="34" charset="-120"/>
               </a:rPr>
-              <a:t>교량마다 사람 손 없이 같은 산출물과 IFC 트윈이 나온다 — 좌표 하나로 끝까지</a:t>
+              <a:t>교량마다 같은 산출물과 IFC 트윈이 자동으로 나온다</a:t>
             </a:r>
             <a:endParaRPr lang="en-US" sz="1450" dirty="0"/>
           </a:p>
@@ -15457,7 +15637,7 @@
                 <a:ea typeface="Paperlogy 5 Medium" pitchFamily="34" charset="-122"/>
                 <a:cs typeface="Paperlogy 5 Medium" pitchFamily="34" charset="-120"/>
               </a:rPr>
-              <a:t>IFC 트윈 + 교면 위성 측점 (산출물 원본)</a:t>
+              <a:t>IFC 트윈 + 교면 위성 측점 (높이는 추정값)</a:t>
             </a:r>
             <a:endParaRPr lang="en-US" sz="900" dirty="0"/>
           </a:p>
@@ -18580,6 +18760,10 @@
             <a:prstDash val="solid"/>
           </a:ln>
         </p:spPr>
+        <p:txBody>
+          <a:bodyPr/>
+          <a:p/>
+        </p:txBody>
       </p:sp>
       <p:sp>
         <p:nvSpPr>
@@ -18646,6 +18830,10 @@
             <a:prstDash val="solid"/>
           </a:ln>
         </p:spPr>
+        <p:txBody>
+          <a:bodyPr/>
+          <a:p/>
+        </p:txBody>
       </p:sp>
       <p:sp>
         <p:nvSpPr>
@@ -18673,6 +18861,10 @@
             <a:prstDash val="solid"/>
           </a:ln>
         </p:spPr>
+        <p:txBody>
+          <a:bodyPr/>
+          <a:p/>
+        </p:txBody>
       </p:sp>
       <p:sp>
         <p:nvSpPr>
@@ -18870,6 +19062,10 @@
             <a:prstDash val="solid"/>
           </a:ln>
         </p:spPr>
+        <p:txBody>
+          <a:bodyPr/>
+          <a:p/>
+        </p:txBody>
       </p:sp>
       <p:sp>
         <p:nvSpPr>
@@ -18897,6 +19093,10 @@
             <a:prstDash val="solid"/>
           </a:ln>
         </p:spPr>
+        <p:txBody>
+          <a:bodyPr/>
+          <a:p/>
+        </p:txBody>
       </p:sp>
       <p:sp>
         <p:nvSpPr>
@@ -18924,6 +19124,10 @@
             <a:prstDash val="solid"/>
           </a:ln>
         </p:spPr>
+        <p:txBody>
+          <a:bodyPr/>
+          <a:p/>
+        </p:txBody>
       </p:sp>
       <p:sp>
         <p:nvSpPr>
@@ -19121,6 +19325,10 @@
             <a:prstDash val="solid"/>
           </a:ln>
         </p:spPr>
+        <p:txBody>
+          <a:bodyPr/>
+          <a:p/>
+        </p:txBody>
       </p:sp>
       <p:sp>
         <p:nvSpPr>
@@ -19148,6 +19356,10 @@
             <a:prstDash val="solid"/>
           </a:ln>
         </p:spPr>
+        <p:txBody>
+          <a:bodyPr/>
+          <a:p/>
+        </p:txBody>
       </p:sp>
       <p:sp>
         <p:nvSpPr>
@@ -19175,6 +19387,10 @@
             <a:prstDash val="solid"/>
           </a:ln>
         </p:spPr>
+        <p:txBody>
+          <a:bodyPr/>
+          <a:p/>
+        </p:txBody>
       </p:sp>
       <p:sp>
         <p:nvSpPr>
@@ -19318,7 +19534,7 @@
                 <a:ea typeface="Paperlogy 5 Medium" pitchFamily="34" charset="-122"/>
                 <a:cs typeface="Paperlogy 5 Medium" pitchFamily="34" charset="-120"/>
               </a:rPr>
-              <a:t>계측 위치 기반 정확도 검증 · CRI 기준 재설정</a:t>
+              <a:t>PINN 성능 평가 · 노후도 추정 · 거동 예측</a:t>
             </a:r>
             <a:endParaRPr lang="en-US" sz="1100" dirty="0"/>
           </a:p>
@@ -19342,7 +19558,7 @@
                 <a:ea typeface="Paperlogy 5 Medium" pitchFamily="34" charset="-122"/>
                 <a:cs typeface="Paperlogy 5 Medium" pitchFamily="34" charset="-120"/>
               </a:rPr>
-              <a:t>코너리플렉터 · 고해상도 SAR 보강</a:t>
+              <a:t>코너리플렉터로 측점 확보 · 정확도 검증</a:t>
             </a:r>
             <a:endParaRPr lang="en-US" sz="1100" dirty="0"/>
           </a:p>
@@ -19374,6 +19590,10 @@
             <a:prstDash val="solid"/>
           </a:ln>
         </p:spPr>
+        <p:txBody>
+          <a:bodyPr/>
+          <a:p/>
+        </p:txBody>
       </p:sp>
       <p:sp>
         <p:nvSpPr>
@@ -19401,6 +19621,10 @@
             <a:prstDash val="solid"/>
           </a:ln>
         </p:spPr>
+        <p:txBody>
+          <a:bodyPr/>
+          <a:p/>
+        </p:txBody>
       </p:sp>
       <p:sp>
         <p:nvSpPr>
@@ -19465,6 +19689,10 @@
             <a:prstDash val="solid"/>
           </a:ln>
         </p:spPr>
+        <p:txBody>
+          <a:bodyPr/>
+          <a:p/>
+        </p:txBody>
       </p:sp>
       <p:sp>
         <p:nvSpPr>
@@ -19585,6 +19813,10 @@
             <a:prstDash val="solid"/>
           </a:ln>
         </p:spPr>
+        <p:txBody>
+          <a:bodyPr/>
+          <a:p/>
+        </p:txBody>
       </p:sp>
       <p:sp>
         <p:nvSpPr>
@@ -19705,6 +19937,10 @@
             <a:prstDash val="solid"/>
           </a:ln>
         </p:spPr>
+        <p:txBody>
+          <a:bodyPr/>
+          <a:p/>
+        </p:txBody>
       </p:sp>
       <p:sp>
         <p:nvSpPr>
@@ -19825,6 +20061,10 @@
             <a:prstDash val="solid"/>
           </a:ln>
         </p:spPr>
+        <p:txBody>
+          <a:bodyPr/>
+          <a:p/>
+        </p:txBody>
       </p:sp>
       <p:sp>
         <p:nvSpPr>
@@ -19947,6 +20187,10 @@
             <a:prstDash val="solid"/>
           </a:ln>
         </p:spPr>
+        <p:txBody>
+          <a:bodyPr/>
+          <a:p/>
+        </p:txBody>
       </p:sp>
       <p:sp>
         <p:nvSpPr>
@@ -19974,6 +20218,10 @@
             <a:prstDash val="solid"/>
           </a:ln>
         </p:spPr>
+        <p:txBody>
+          <a:bodyPr/>
+          <a:p/>
+        </p:txBody>
       </p:sp>
       <p:sp>
         <p:nvSpPr>
@@ -20167,6 +20415,10 @@
             <a:prstDash val="solid"/>
           </a:ln>
         </p:spPr>
+        <p:txBody>
+          <a:bodyPr/>
+          <a:p/>
+        </p:txBody>
       </p:sp>
       <p:sp>
         <p:nvSpPr>

--- a/docs/KICT_Bmaps_Inframon_연구개발_7p_vF.pptx
+++ b/docs/KICT_Bmaps_Inframon_연구개발_7p_vF.pptx
@@ -4025,7 +4025,7 @@
                 <a:ea typeface="Paperlogy 5 Medium"/>
                 <a:cs typeface="Paperlogy 5 Medium"/>
               </a:rPr>
-              <a:t>단계별 추진 계획 · KICT 협의 요청 · 기대 효과</a:t>
+              <a:t>단계별 추진 계획 · KICT 자료 요청 · 기대 효과</a:t>
             </a:r>
           </a:p>
         </p:txBody>

--- a/docs/KICT_Bmaps_Inframon_연구개발_7p_vF.pptx
+++ b/docs/KICT_Bmaps_Inframon_연구개발_7p_vF.pptx
@@ -15,6 +15,7 @@
     <p:sldId id="260" r:id="rId15"/>
     <p:sldId id="261" r:id="rId16"/>
     <p:sldId id="262" r:id="rId17"/>
+    <p:sldId id="263" r:id="rId18"/>
   </p:sldIdLst>
   <p:sldSz cx="12192000" cy="6858000"/>
   <p:notesSz cx="7104063" cy="10234613"/>
@@ -11764,45 +11765,14 @@
       </p:sp>
       <p:sp>
         <p:nvSpPr>
-          <p:cNvPr id="3060" name="Shape 65"/>
-          <p:cNvSpPr/>
-          <p:nvPr/>
-        </p:nvSpPr>
-        <p:spPr>
-          <a:xfrm>
-            <a:off x="7589520" y="3520440"/>
-            <a:ext cx="2020824" cy="1280160"/>
-          </a:xfrm>
-          <a:prstGeom prst="roundRect">
-            <a:avLst>
-              <a:gd name="adj" fmla="val 4286"/>
-            </a:avLst>
-          </a:prstGeom>
-          <a:solidFill>
-            <a:srgbClr val="FFFFFF"/>
-          </a:solidFill>
-          <a:ln w="9525">
-            <a:solidFill>
-              <a:srgbClr val="E3E6EA"/>
-            </a:solidFill>
-            <a:prstDash val="solid"/>
-          </a:ln>
-        </p:spPr>
-        <p:txBody>
-          <a:bodyPr/>
-          <a:p/>
-        </p:txBody>
-      </p:sp>
-      <p:sp>
-        <p:nvSpPr>
-          <p:cNvPr id="3064" name="Text 66"/>
+          <p:cNvPr id="3060" name="Text 77"/>
           <p:cNvSpPr txBox="1"/>
           <p:nvPr/>
         </p:nvSpPr>
         <p:spPr>
           <a:xfrm>
-            <a:off x="7772400" y="3630168"/>
-            <a:ext cx="1700784" cy="475488"/>
+            <a:off x="411480" y="6355080"/>
+            <a:ext cx="11365992" cy="274320"/>
           </a:xfrm>
           <a:prstGeom prst="rect">
             <a:avLst/>
@@ -11818,478 +11788,526 @@
               <a:buNone/>
             </a:pPr>
             <a:r>
-              <a:rPr lang="en-US" sz="2400" dirty="0">
-                <a:solidFill>
-                  <a:srgbClr val="1C5B8A"/>
-                </a:solidFill>
-                <a:latin typeface="Paperlogy 7 Bold" pitchFamily="34" charset="0"/>
-                <a:ea typeface="Paperlogy 7 Bold" pitchFamily="34" charset="-122"/>
-                <a:cs typeface="Paperlogy 7 Bold" pitchFamily="34" charset="-120"/>
-              </a:rPr>
-              <a:t>6</a:t>
-            </a:r>
-            <a:r>
-              <a:rPr lang="en-US" sz="1200" dirty="0">
-                <a:solidFill>
-                  <a:srgbClr val="1C5B8A"/>
-                </a:solidFill>
-                <a:latin typeface="Paperlogy 7 Bold" pitchFamily="34" charset="0"/>
-                <a:ea typeface="Paperlogy 7 Bold" pitchFamily="34" charset="-122"/>
-                <a:cs typeface="Paperlogy 7 Bold" pitchFamily="34" charset="-120"/>
-              </a:rPr>
-              <a:t>  단계</a:t>
-            </a:r>
-            <a:endParaRPr lang="en-US" sz="1100" dirty="0"/>
-          </a:p>
-        </p:txBody>
-      </p:sp>
-      <p:sp>
-        <p:nvSpPr>
-          <p:cNvPr id="3068" name="Text 67"/>
-          <p:cNvSpPr txBox="1"/>
-          <p:nvPr/>
-        </p:nvSpPr>
-        <p:spPr>
-          <a:xfrm>
-            <a:off x="7772400" y="4123944"/>
-            <a:ext cx="1700784" cy="603504"/>
-          </a:xfrm>
-          <a:prstGeom prst="rect">
-            <a:avLst/>
-          </a:prstGeom>
-          <a:noFill/>
-          <a:ln/>
-        </p:spPr>
-        <p:txBody>
-          <a:bodyPr wrap="square" lIns="0" tIns="0" rIns="0" bIns="0" rtlCol="0" anchor="t"/>
-          <a:lstStyle/>
-          <a:p>
-            <a:pPr marL="0" indent="0">
-              <a:lnSpc>
-                <a:spcPct val="110000"/>
-              </a:lnSpc>
-              <a:buNone/>
-            </a:pPr>
-            <a:r>
-              <a:rPr lang="en-US" sz="1000" dirty="0">
-                <a:solidFill>
-                  <a:srgbClr val="373D47"/>
+              <a:rPr lang="en-US" sz="850" dirty="0">
+                <a:solidFill>
+                  <a:srgbClr val="6B7480"/>
                 </a:solidFill>
                 <a:latin typeface="Paperlogy 5 Medium" pitchFamily="34" charset="0"/>
                 <a:ea typeface="Paperlogy 5 Medium" pitchFamily="34" charset="-122"/>
                 <a:cs typeface="Paperlogy 5 Medium" pitchFamily="34" charset="-120"/>
               </a:rPr>
-              <a:t>영상 고르기부터 B-Maps 전달까지</a:t>
-            </a:r>
-            <a:endParaRPr lang="en-US" sz="1000" dirty="0"/>
-          </a:p>
-        </p:txBody>
-      </p:sp>
-      <p:sp>
-        <p:nvSpPr>
-          <p:cNvPr id="3072" name="Shape 68"/>
+              <a:t>※ 실행 예: python scripts/bridge_run.py --name 성수대교 --lat 37.5374 --lon 127.0351 — 궤도 자료가 없으면 영상 선별·다운로드·처리부터 스스로 수행.</a:t>
+            </a:r>
+            <a:endParaRPr lang="en-US" sz="850" dirty="0"/>
+          </a:p>
+        </p:txBody>
+      </p:sp>
+      <p:sp>
+        <p:nvSpPr>
+          <p:cNvPr id="3064" name="Rectangle 80"/>
           <p:cNvSpPr/>
           <p:nvPr/>
         </p:nvSpPr>
         <p:spPr>
           <a:xfrm>
-            <a:off x="9756648" y="3520440"/>
-            <a:ext cx="2020824" cy="1280160"/>
-          </a:xfrm>
-          <a:prstGeom prst="roundRect">
-            <a:avLst>
-              <a:gd name="adj" fmla="val 4286"/>
-            </a:avLst>
+            <a:off x="7589520" y="3977640"/>
+            <a:ext cx="4233672" cy="2057400"/>
+          </a:xfrm>
+          <a:prstGeom prst="rect">
+            <a:avLst/>
           </a:prstGeom>
           <a:solidFill>
-            <a:srgbClr val="FFFFFF"/>
+            <a:srgbClr val="F5F7F9"/>
           </a:solidFill>
-          <a:ln w="9525">
+          <a:ln w="12700">
             <a:solidFill>
-              <a:srgbClr val="E3E6EA"/>
+              <a:srgbClr val="E9EBEE"/>
             </a:solidFill>
-            <a:prstDash val="solid"/>
           </a:ln>
-        </p:spPr>
-        <p:txBody>
-          <a:bodyPr/>
-          <a:p/>
-        </p:txBody>
-      </p:sp>
-      <p:sp>
-        <p:nvSpPr>
-          <p:cNvPr id="3076" name="Text 69"/>
+          <a:effectLst/>
+        </p:spPr>
+        <p:style>
+          <a:lnRef idx="1">
+            <a:schemeClr val="accent1"/>
+          </a:lnRef>
+          <a:fillRef idx="3">
+            <a:schemeClr val="accent1"/>
+          </a:fillRef>
+          <a:effectRef idx="2">
+            <a:schemeClr val="accent1"/>
+          </a:effectRef>
+          <a:fontRef idx="minor">
+            <a:schemeClr val="lt1"/>
+          </a:fontRef>
+        </p:style>
+        <p:txBody>
+          <a:bodyPr rtlCol="0" anchor="ctr"/>
+          <a:lstStyle/>
+          <a:p>
+            <a:pPr algn="ctr"/>
+          </a:p>
+        </p:txBody>
+      </p:sp>
+      <p:sp>
+        <p:nvSpPr>
+          <p:cNvPr id="3068" name="Rectangle 81"/>
+          <p:cNvSpPr/>
+          <p:nvPr/>
+        </p:nvSpPr>
+        <p:spPr>
+          <a:xfrm>
+            <a:off x="8951976" y="3835908"/>
+            <a:ext cx="1508760" cy="283464"/>
+          </a:xfrm>
+          <a:prstGeom prst="rect">
+            <a:avLst/>
+          </a:prstGeom>
+          <a:solidFill>
+            <a:srgbClr val="373D47"/>
+          </a:solidFill>
+          <a:ln>
+            <a:noFill/>
+          </a:ln>
+          <a:effectLst/>
+        </p:spPr>
+        <p:style>
+          <a:lnRef idx="1">
+            <a:schemeClr val="accent1"/>
+          </a:lnRef>
+          <a:fillRef idx="3">
+            <a:schemeClr val="accent1"/>
+          </a:fillRef>
+          <a:effectRef idx="2">
+            <a:schemeClr val="accent1"/>
+          </a:effectRef>
+          <a:fontRef idx="minor">
+            <a:schemeClr val="lt1"/>
+          </a:fontRef>
+        </p:style>
+        <p:txBody>
+          <a:bodyPr rtlCol="0" anchor="ctr"/>
+          <a:lstStyle/>
+          <a:p>
+            <a:pPr algn="ctr"/>
+          </a:p>
+        </p:txBody>
+      </p:sp>
+      <p:sp>
+        <p:nvSpPr>
+          <p:cNvPr id="3072" name="TextBox 82"/>
           <p:cNvSpPr txBox="1"/>
           <p:nvPr/>
         </p:nvSpPr>
         <p:spPr>
           <a:xfrm>
-            <a:off x="9939528" y="3630168"/>
-            <a:ext cx="1700784" cy="475488"/>
+            <a:off x="8951976" y="3835908"/>
+            <a:ext cx="1508760" cy="283464"/>
           </a:xfrm>
           <a:prstGeom prst="rect">
             <a:avLst/>
           </a:prstGeom>
           <a:noFill/>
-          <a:ln/>
-        </p:spPr>
-        <p:txBody>
-          <a:bodyPr wrap="square" lIns="0" tIns="0" rIns="0" bIns="0" rtlCol="0" anchor="ctr"/>
-          <a:lstStyle/>
-          <a:p>
-            <a:pPr marL="0" indent="0">
-              <a:buNone/>
+        </p:spPr>
+        <p:txBody>
+          <a:bodyPr wrap="square" anchor="ctr" lIns="0" rIns="0" tIns="0" bIns="0">
+            <a:spAutoFit/>
+          </a:bodyPr>
+          <a:lstStyle/>
+          <a:p>
+            <a:pPr algn="ctr">
+              <a:lnSpc>
+                <a:spcPct val="100000"/>
+              </a:lnSpc>
             </a:pPr>
             <a:r>
-              <a:rPr lang="en-US" sz="2400" dirty="0">
-                <a:solidFill>
-                  <a:srgbClr val="373D47"/>
-                </a:solidFill>
-                <a:latin typeface="Paperlogy 7 Bold" pitchFamily="34" charset="0"/>
-                <a:ea typeface="Paperlogy 7 Bold" pitchFamily="34" charset="-122"/>
-                <a:cs typeface="Paperlogy 7 Bold" pitchFamily="34" charset="-120"/>
-              </a:rPr>
-              <a:t>1</a:t>
-            </a:r>
-            <a:r>
-              <a:rPr lang="en-US" sz="1200" dirty="0">
-                <a:solidFill>
-                  <a:srgbClr val="373D47"/>
-                </a:solidFill>
-                <a:latin typeface="Paperlogy 7 Bold" pitchFamily="34" charset="0"/>
-                <a:ea typeface="Paperlogy 7 Bold" pitchFamily="34" charset="-122"/>
-                <a:cs typeface="Paperlogy 7 Bold" pitchFamily="34" charset="-120"/>
-              </a:rPr>
-              <a:t>  개</a:t>
-            </a:r>
-            <a:endParaRPr lang="en-US" sz="1100" dirty="0"/>
-          </a:p>
-        </p:txBody>
-      </p:sp>
-      <p:sp>
-        <p:nvSpPr>
-          <p:cNvPr id="3080" name="Text 70"/>
+              <a:rPr sz="1250" b="1">
+                <a:solidFill>
+                  <a:srgbClr val="FFFFFF"/>
+                </a:solidFill>
+                <a:latin typeface="Paperlogy 7 Bold"/>
+                <a:ea typeface="Paperlogy 7 Bold"/>
+                <a:cs typeface="Paperlogy 7 Bold"/>
+              </a:rPr>
+              <a:t>원리상 못 하는 것</a:t>
+            </a:r>
+          </a:p>
+        </p:txBody>
+      </p:sp>
+      <p:sp>
+        <p:nvSpPr>
+          <p:cNvPr id="3076" name="Rectangle 83"/>
+          <p:cNvSpPr/>
+          <p:nvPr/>
+        </p:nvSpPr>
+        <p:spPr>
+          <a:xfrm>
+            <a:off x="7754112" y="4453128"/>
+            <a:ext cx="45720" cy="182880"/>
+          </a:xfrm>
+          <a:prstGeom prst="rect">
+            <a:avLst/>
+          </a:prstGeom>
+          <a:solidFill>
+            <a:srgbClr val="1C5B8A"/>
+          </a:solidFill>
+          <a:ln>
+            <a:noFill/>
+          </a:ln>
+          <a:effectLst/>
+        </p:spPr>
+        <p:style>
+          <a:lnRef idx="1">
+            <a:schemeClr val="accent1"/>
+          </a:lnRef>
+          <a:fillRef idx="3">
+            <a:schemeClr val="accent1"/>
+          </a:fillRef>
+          <a:effectRef idx="2">
+            <a:schemeClr val="accent1"/>
+          </a:effectRef>
+          <a:fontRef idx="minor">
+            <a:schemeClr val="lt1"/>
+          </a:fontRef>
+        </p:style>
+        <p:txBody>
+          <a:bodyPr rtlCol="0" anchor="ctr"/>
+          <a:lstStyle/>
+          <a:p>
+            <a:pPr algn="ctr"/>
+          </a:p>
+        </p:txBody>
+      </p:sp>
+      <p:sp>
+        <p:nvSpPr>
+          <p:cNvPr id="3080" name="TextBox 84"/>
           <p:cNvSpPr txBox="1"/>
           <p:nvPr/>
         </p:nvSpPr>
         <p:spPr>
           <a:xfrm>
-            <a:off x="9939528" y="4123944"/>
-            <a:ext cx="1700784" cy="603504"/>
+            <a:off x="7900416" y="4398264"/>
+            <a:ext cx="3758184" cy="219456"/>
           </a:xfrm>
           <a:prstGeom prst="rect">
             <a:avLst/>
           </a:prstGeom>
           <a:noFill/>
-          <a:ln/>
-        </p:spPr>
-        <p:txBody>
-          <a:bodyPr wrap="square" lIns="0" tIns="0" rIns="0" bIns="0" rtlCol="0" anchor="t"/>
-          <a:lstStyle/>
-          <a:p>
-            <a:pPr marL="0" indent="0">
+        </p:spPr>
+        <p:txBody>
+          <a:bodyPr wrap="square" anchor="t" lIns="0" rIns="0" tIns="0" bIns="0">
+            <a:spAutoFit/>
+          </a:bodyPr>
+          <a:lstStyle/>
+          <a:p>
+            <a:pPr algn="l">
               <a:lnSpc>
-                <a:spcPct val="110000"/>
+                <a:spcPct val="100000"/>
               </a:lnSpc>
-              <a:buNone/>
             </a:pPr>
             <a:r>
-              <a:rPr lang="en-US" sz="1000" dirty="0">
-                <a:solidFill>
-                  <a:srgbClr val="373D47"/>
-                </a:solidFill>
-                <a:latin typeface="Paperlogy 5 Medium" pitchFamily="34" charset="0"/>
-                <a:ea typeface="Paperlogy 5 Medium" pitchFamily="34" charset="-122"/>
-                <a:cs typeface="Paperlogy 5 Medium" pitchFamily="34" charset="-120"/>
-              </a:rPr>
-              <a:t>넣는 것은 좌표뿐</a:t>
-            </a:r>
-            <a:endParaRPr lang="en-US" sz="1000" dirty="0"/>
-          </a:p>
-        </p:txBody>
-      </p:sp>
-      <p:sp>
-        <p:nvSpPr>
-          <p:cNvPr id="3084" name="Shape 71"/>
+              <a:rPr sz="1100" b="1">
+                <a:solidFill>
+                  <a:srgbClr val="10171E"/>
+                </a:solidFill>
+                <a:latin typeface="Paperlogy 7 Bold"/>
+                <a:ea typeface="Paperlogy 7 Bold"/>
+                <a:cs typeface="Paperlogy 7 Bold"/>
+              </a:rPr>
+              <a:t>교면 측점 밀도</a:t>
+            </a:r>
+          </a:p>
+        </p:txBody>
+      </p:sp>
+      <p:sp>
+        <p:nvSpPr>
+          <p:cNvPr id="3084" name="TextBox 85"/>
+          <p:cNvSpPr txBox="1"/>
+          <p:nvPr/>
+        </p:nvSpPr>
+        <p:spPr>
+          <a:xfrm>
+            <a:off x="7900416" y="4617720"/>
+            <a:ext cx="3758184" cy="384048"/>
+          </a:xfrm>
+          <a:prstGeom prst="rect">
+            <a:avLst/>
+          </a:prstGeom>
+          <a:noFill/>
+        </p:spPr>
+        <p:txBody>
+          <a:bodyPr wrap="square" anchor="t" lIns="0" rIns="0" tIns="0" bIns="0">
+            <a:spAutoFit/>
+          </a:bodyPr>
+          <a:lstStyle/>
+          <a:p>
+            <a:pPr algn="l">
+              <a:lnSpc>
+                <a:spcPct val="100000"/>
+              </a:lnSpc>
+            </a:pPr>
+            <a:r>
+              <a:rPr sz="919" b="0">
+                <a:solidFill>
+                  <a:srgbClr val="6B7480"/>
+                </a:solidFill>
+                <a:latin typeface="Paperlogy 5 Medium"/>
+                <a:ea typeface="Paperlogy 5 Medium"/>
+                <a:cs typeface="Paperlogy 5 Medium"/>
+              </a:rPr>
+              <a:t>위성 화소가 지상 5×20 m 다. 데크 폭은 1~2 화소라 프로그램으로 늘릴 수 없다</a:t>
+            </a:r>
+          </a:p>
+        </p:txBody>
+      </p:sp>
+      <p:sp>
+        <p:nvSpPr>
+          <p:cNvPr id="3088" name="Rectangle 86"/>
           <p:cNvSpPr/>
           <p:nvPr/>
         </p:nvSpPr>
         <p:spPr>
           <a:xfrm>
-            <a:off x="7589520" y="4892040"/>
-            <a:ext cx="2020824" cy="1280160"/>
-          </a:xfrm>
-          <a:prstGeom prst="roundRect">
-            <a:avLst>
-              <a:gd name="adj" fmla="val 4286"/>
-            </a:avLst>
+            <a:off x="7754112" y="5001768"/>
+            <a:ext cx="45720" cy="182880"/>
+          </a:xfrm>
+          <a:prstGeom prst="rect">
+            <a:avLst/>
           </a:prstGeom>
           <a:solidFill>
-            <a:srgbClr val="FFFFFF"/>
+            <a:srgbClr val="1C5B8A"/>
           </a:solidFill>
-          <a:ln w="9525">
-            <a:solidFill>
-              <a:srgbClr val="E3E6EA"/>
-            </a:solidFill>
-            <a:prstDash val="solid"/>
+          <a:ln>
+            <a:noFill/>
           </a:ln>
-        </p:spPr>
-        <p:txBody>
-          <a:bodyPr/>
-          <a:p/>
-        </p:txBody>
-      </p:sp>
-      <p:sp>
-        <p:nvSpPr>
-          <p:cNvPr id="3088" name="Text 72"/>
+          <a:effectLst/>
+        </p:spPr>
+        <p:style>
+          <a:lnRef idx="1">
+            <a:schemeClr val="accent1"/>
+          </a:lnRef>
+          <a:fillRef idx="3">
+            <a:schemeClr val="accent1"/>
+          </a:fillRef>
+          <a:effectRef idx="2">
+            <a:schemeClr val="accent1"/>
+          </a:effectRef>
+          <a:fontRef idx="minor">
+            <a:schemeClr val="lt1"/>
+          </a:fontRef>
+        </p:style>
+        <p:txBody>
+          <a:bodyPr rtlCol="0" anchor="ctr"/>
+          <a:lstStyle/>
+          <a:p>
+            <a:pPr algn="ctr"/>
+          </a:p>
+        </p:txBody>
+      </p:sp>
+      <p:sp>
+        <p:nvSpPr>
+          <p:cNvPr id="3092" name="TextBox 87"/>
           <p:cNvSpPr txBox="1"/>
           <p:nvPr/>
         </p:nvSpPr>
         <p:spPr>
           <a:xfrm>
-            <a:off x="7772400" y="5001768"/>
-            <a:ext cx="1700784" cy="475488"/>
+            <a:off x="7900416" y="4946904"/>
+            <a:ext cx="3758184" cy="219456"/>
           </a:xfrm>
           <a:prstGeom prst="rect">
             <a:avLst/>
           </a:prstGeom>
           <a:noFill/>
-          <a:ln/>
-        </p:spPr>
-        <p:txBody>
-          <a:bodyPr wrap="square" lIns="0" tIns="0" rIns="0" bIns="0" rtlCol="0" anchor="ctr"/>
-          <a:lstStyle/>
-          <a:p>
-            <a:pPr marL="0" indent="0">
-              <a:buNone/>
+        </p:spPr>
+        <p:txBody>
+          <a:bodyPr wrap="square" anchor="t" lIns="0" rIns="0" tIns="0" bIns="0">
+            <a:spAutoFit/>
+          </a:bodyPr>
+          <a:lstStyle/>
+          <a:p>
+            <a:pPr algn="l">
+              <a:lnSpc>
+                <a:spcPct val="100000"/>
+              </a:lnSpc>
             </a:pPr>
             <a:r>
-              <a:rPr lang="en-US" sz="2400" dirty="0">
-                <a:solidFill>
-                  <a:srgbClr val="1C5B8A"/>
-                </a:solidFill>
-                <a:latin typeface="Paperlogy 7 Bold" pitchFamily="34" charset="0"/>
-                <a:ea typeface="Paperlogy 7 Bold" pitchFamily="34" charset="-122"/>
-                <a:cs typeface="Paperlogy 7 Bold" pitchFamily="34" charset="-120"/>
-              </a:rPr>
-              <a:t>12</a:t>
-            </a:r>
-            <a:r>
-              <a:rPr lang="en-US" sz="1200" dirty="0">
-                <a:solidFill>
-                  <a:srgbClr val="1C5B8A"/>
-                </a:solidFill>
-                <a:latin typeface="Paperlogy 7 Bold" pitchFamily="34" charset="0"/>
-                <a:ea typeface="Paperlogy 7 Bold" pitchFamily="34" charset="-122"/>
-                <a:cs typeface="Paperlogy 7 Bold" pitchFamily="34" charset="-120"/>
-              </a:rPr>
-              <a:t>  일</a:t>
-            </a:r>
-            <a:endParaRPr lang="en-US" sz="1100" dirty="0"/>
-          </a:p>
-        </p:txBody>
-      </p:sp>
-      <p:sp>
-        <p:nvSpPr>
-          <p:cNvPr id="3092" name="Text 73"/>
+              <a:rPr sz="1100" b="1">
+                <a:solidFill>
+                  <a:srgbClr val="10171E"/>
+                </a:solidFill>
+                <a:latin typeface="Paperlogy 7 Bold"/>
+                <a:ea typeface="Paperlogy 7 Bold"/>
+                <a:cs typeface="Paperlogy 7 Bold"/>
+              </a:rPr>
+              <a:t>절대 강성(EI)</a:t>
+            </a:r>
+          </a:p>
+        </p:txBody>
+      </p:sp>
+      <p:sp>
+        <p:nvSpPr>
+          <p:cNvPr id="3096" name="TextBox 88"/>
           <p:cNvSpPr txBox="1"/>
           <p:nvPr/>
         </p:nvSpPr>
         <p:spPr>
           <a:xfrm>
-            <a:off x="7772400" y="5495544"/>
-            <a:ext cx="1700784" cy="603504"/>
+            <a:off x="7900416" y="5166360"/>
+            <a:ext cx="3758184" cy="384048"/>
           </a:xfrm>
           <a:prstGeom prst="rect">
             <a:avLst/>
           </a:prstGeom>
           <a:noFill/>
-          <a:ln/>
-        </p:spPr>
-        <p:txBody>
-          <a:bodyPr wrap="square" lIns="0" tIns="0" rIns="0" bIns="0" rtlCol="0" anchor="t"/>
-          <a:lstStyle/>
-          <a:p>
-            <a:pPr marL="0" indent="0">
+        </p:spPr>
+        <p:txBody>
+          <a:bodyPr wrap="square" anchor="t" lIns="0" rIns="0" tIns="0" bIns="0">
+            <a:spAutoFit/>
+          </a:bodyPr>
+          <a:lstStyle/>
+          <a:p>
+            <a:pPr algn="l">
               <a:lnSpc>
-                <a:spcPct val="110000"/>
+                <a:spcPct val="100000"/>
               </a:lnSpc>
-              <a:buNone/>
             </a:pPr>
             <a:r>
-              <a:rPr lang="en-US" sz="1000" dirty="0">
-                <a:solidFill>
-                  <a:srgbClr val="373D47"/>
-                </a:solidFill>
-                <a:latin typeface="Paperlogy 5 Medium" pitchFamily="34" charset="0"/>
-                <a:ea typeface="Paperlogy 5 Medium" pitchFamily="34" charset="-122"/>
-                <a:cs typeface="Paperlogy 5 Medium" pitchFamily="34" charset="-120"/>
-              </a:rPr>
-              <a:t>위성이 다시 찍는 주기</a:t>
-            </a:r>
-            <a:endParaRPr lang="en-US" sz="1000" dirty="0"/>
-          </a:p>
-        </p:txBody>
-      </p:sp>
-      <p:sp>
-        <p:nvSpPr>
-          <p:cNvPr id="3096" name="Shape 74"/>
+              <a:rPr sz="919" b="0">
+                <a:solidFill>
+                  <a:srgbClr val="6B7480"/>
+                </a:solidFill>
+                <a:latin typeface="Paperlogy 5 Medium"/>
+                <a:ea typeface="Paperlogy 5 Medium"/>
+                <a:cs typeface="Paperlogy 5 Medium"/>
+              </a:rPr>
+              <a:t>상대 변위만 보므로 관측으로 낼 수 없다 — 설계 제원으로 계산한 값이다</a:t>
+            </a:r>
+          </a:p>
+        </p:txBody>
+      </p:sp>
+      <p:sp>
+        <p:nvSpPr>
+          <p:cNvPr id="3100" name="Rectangle 89"/>
           <p:cNvSpPr/>
           <p:nvPr/>
         </p:nvSpPr>
         <p:spPr>
           <a:xfrm>
-            <a:off x="9756648" y="4892040"/>
-            <a:ext cx="2020824" cy="1280160"/>
-          </a:xfrm>
-          <a:prstGeom prst="roundRect">
-            <a:avLst>
-              <a:gd name="adj" fmla="val 4286"/>
-            </a:avLst>
+            <a:off x="7754112" y="5550408"/>
+            <a:ext cx="45720" cy="182880"/>
+          </a:xfrm>
+          <a:prstGeom prst="rect">
+            <a:avLst/>
           </a:prstGeom>
           <a:solidFill>
-            <a:srgbClr val="FFFFFF"/>
+            <a:srgbClr val="1C5B8A"/>
           </a:solidFill>
-          <a:ln w="9525">
-            <a:solidFill>
-              <a:srgbClr val="E3E6EA"/>
-            </a:solidFill>
-            <a:prstDash val="solid"/>
+          <a:ln>
+            <a:noFill/>
           </a:ln>
-        </p:spPr>
-        <p:txBody>
-          <a:bodyPr/>
-          <a:p/>
-        </p:txBody>
-      </p:sp>
-      <p:sp>
-        <p:nvSpPr>
-          <p:cNvPr id="3100" name="Text 75"/>
+          <a:effectLst/>
+        </p:spPr>
+        <p:style>
+          <a:lnRef idx="1">
+            <a:schemeClr val="accent1"/>
+          </a:lnRef>
+          <a:fillRef idx="3">
+            <a:schemeClr val="accent1"/>
+          </a:fillRef>
+          <a:effectRef idx="2">
+            <a:schemeClr val="accent1"/>
+          </a:effectRef>
+          <a:fontRef idx="minor">
+            <a:schemeClr val="lt1"/>
+          </a:fontRef>
+        </p:style>
+        <p:txBody>
+          <a:bodyPr rtlCol="0" anchor="ctr"/>
+          <a:lstStyle/>
+          <a:p>
+            <a:pPr algn="ctr"/>
+          </a:p>
+        </p:txBody>
+      </p:sp>
+      <p:sp>
+        <p:nvSpPr>
+          <p:cNvPr id="3104" name="TextBox 90"/>
           <p:cNvSpPr txBox="1"/>
           <p:nvPr/>
         </p:nvSpPr>
         <p:spPr>
           <a:xfrm>
-            <a:off x="9939528" y="5001768"/>
-            <a:ext cx="1700784" cy="475488"/>
+            <a:off x="7900416" y="5495544"/>
+            <a:ext cx="3758184" cy="219456"/>
           </a:xfrm>
           <a:prstGeom prst="rect">
             <a:avLst/>
           </a:prstGeom>
           <a:noFill/>
-          <a:ln/>
-        </p:spPr>
-        <p:txBody>
-          <a:bodyPr wrap="square" lIns="0" tIns="0" rIns="0" bIns="0" rtlCol="0" anchor="ctr"/>
-          <a:lstStyle/>
-          <a:p>
-            <a:pPr marL="0" indent="0">
-              <a:buNone/>
+        </p:spPr>
+        <p:txBody>
+          <a:bodyPr wrap="square" anchor="t" lIns="0" rIns="0" tIns="0" bIns="0">
+            <a:spAutoFit/>
+          </a:bodyPr>
+          <a:lstStyle/>
+          <a:p>
+            <a:pPr algn="l">
+              <a:lnSpc>
+                <a:spcPct val="100000"/>
+              </a:lnSpc>
             </a:pPr>
             <a:r>
-              <a:rPr lang="en-US" sz="2400" dirty="0">
-                <a:solidFill>
-                  <a:srgbClr val="ED6C00"/>
-                </a:solidFill>
-                <a:latin typeface="Paperlogy 7 Bold" pitchFamily="34" charset="0"/>
-                <a:ea typeface="Paperlogy 7 Bold" pitchFamily="34" charset="-122"/>
-                <a:cs typeface="Paperlogy 7 Bold" pitchFamily="34" charset="-120"/>
-              </a:rPr>
-              <a:t>0</a:t>
-            </a:r>
-            <a:r>
-              <a:rPr lang="en-US" sz="1200" dirty="0">
-                <a:solidFill>
-                  <a:srgbClr val="ED6C00"/>
-                </a:solidFill>
-                <a:latin typeface="Paperlogy 7 Bold" pitchFamily="34" charset="0"/>
-                <a:ea typeface="Paperlogy 7 Bold" pitchFamily="34" charset="-122"/>
-                <a:cs typeface="Paperlogy 7 Bold" pitchFamily="34" charset="-120"/>
-              </a:rPr>
-              <a:t>  개</a:t>
-            </a:r>
-            <a:endParaRPr lang="en-US" sz="1100" dirty="0"/>
-          </a:p>
-        </p:txBody>
-      </p:sp>
-      <p:sp>
-        <p:nvSpPr>
-          <p:cNvPr id="3104" name="Text 76"/>
+              <a:rPr sz="1100" b="1">
+                <a:solidFill>
+                  <a:srgbClr val="10171E"/>
+                </a:solidFill>
+                <a:latin typeface="Paperlogy 7 Bold"/>
+                <a:ea typeface="Paperlogy 7 Bold"/>
+                <a:cs typeface="Paperlogy 7 Bold"/>
+              </a:rPr>
+              <a:t>연직 변위</a:t>
+            </a:r>
+          </a:p>
+        </p:txBody>
+      </p:sp>
+      <p:sp>
+        <p:nvSpPr>
+          <p:cNvPr id="3108" name="TextBox 91"/>
           <p:cNvSpPr txBox="1"/>
           <p:nvPr/>
         </p:nvSpPr>
         <p:spPr>
           <a:xfrm>
-            <a:off x="9939528" y="5495544"/>
-            <a:ext cx="1700784" cy="603504"/>
+            <a:off x="7900416" y="5715000"/>
+            <a:ext cx="3758184" cy="384048"/>
           </a:xfrm>
           <a:prstGeom prst="rect">
             <a:avLst/>
           </a:prstGeom>
           <a:noFill/>
-          <a:ln/>
-        </p:spPr>
-        <p:txBody>
-          <a:bodyPr wrap="square" lIns="0" tIns="0" rIns="0" bIns="0" rtlCol="0" anchor="t"/>
-          <a:lstStyle/>
-          <a:p>
-            <a:pPr marL="0" indent="0">
+        </p:spPr>
+        <p:txBody>
+          <a:bodyPr wrap="square" anchor="t" lIns="0" rIns="0" tIns="0" bIns="0">
+            <a:spAutoFit/>
+          </a:bodyPr>
+          <a:lstStyle/>
+          <a:p>
+            <a:pPr algn="l">
               <a:lnSpc>
-                <a:spcPct val="110000"/>
+                <a:spcPct val="100000"/>
               </a:lnSpc>
-              <a:buNone/>
             </a:pPr>
             <a:r>
-              <a:rPr lang="en-US" sz="1000" dirty="0">
-                <a:solidFill>
-                  <a:srgbClr val="373D47"/>
-                </a:solidFill>
-                <a:latin typeface="Paperlogy 5 Medium" pitchFamily="34" charset="0"/>
-                <a:ea typeface="Paperlogy 5 Medium" pitchFamily="34" charset="-122"/>
-                <a:cs typeface="Paperlogy 5 Medium" pitchFamily="34" charset="-120"/>
-              </a:rPr>
-              <a:t>교량에 다는 장비</a:t>
-            </a:r>
-            <a:endParaRPr lang="en-US" sz="1000" dirty="0"/>
-          </a:p>
-        </p:txBody>
-      </p:sp>
-      <p:sp>
-        <p:nvSpPr>
-          <p:cNvPr id="3108" name="Text 77"/>
-          <p:cNvSpPr txBox="1"/>
-          <p:nvPr/>
-        </p:nvSpPr>
-        <p:spPr>
-          <a:xfrm>
-            <a:off x="411480" y="6355080"/>
-            <a:ext cx="11365992" cy="274320"/>
-          </a:xfrm>
-          <a:prstGeom prst="rect">
-            <a:avLst/>
-          </a:prstGeom>
-          <a:noFill/>
-          <a:ln/>
-        </p:spPr>
-        <p:txBody>
-          <a:bodyPr wrap="square" lIns="0" tIns="0" rIns="0" bIns="0" rtlCol="0" anchor="ctr"/>
-          <a:lstStyle/>
-          <a:p>
-            <a:pPr marL="0" indent="0">
-              <a:buNone/>
-            </a:pPr>
-            <a:r>
-              <a:rPr lang="en-US" sz="850" dirty="0">
+              <a:rPr sz="919" b="0">
                 <a:solidFill>
                   <a:srgbClr val="6B7480"/>
                 </a:solidFill>
-                <a:latin typeface="Paperlogy 5 Medium" pitchFamily="34" charset="0"/>
-                <a:ea typeface="Paperlogy 5 Medium" pitchFamily="34" charset="-122"/>
-                <a:cs typeface="Paperlogy 5 Medium" pitchFamily="34" charset="-120"/>
-              </a:rPr>
-              <a:t>※ 실행 예: python scripts/bridge_run.py --name 성수대교 --lat 37.5374 --lon 127.0351 — 궤도 자료가 없으면 영상 선별·다운로드·처리부터 스스로 수행.</a:t>
-            </a:r>
-            <a:endParaRPr lang="en-US" sz="850" dirty="0"/>
+                <a:latin typeface="Paperlogy 5 Medium"/>
+                <a:ea typeface="Paperlogy 5 Medium"/>
+                <a:cs typeface="Paperlogy 5 Medium"/>
+              </a:rPr>
+              <a:t>한 궤도로는 위성 시선 방향만 나온다. 두 궤도를 합쳐야 위아래가 된다</a:t>
+            </a:r>
           </a:p>
         </p:txBody>
       </p:sp>
@@ -20506,6 +20524,1795 @@
               <a:t>문의 · 재현 자료: README.md · docs/Bmaps_연동_인터페이스.md · examples/bmaps_tab/</a:t>
             </a:r>
             <a:endParaRPr lang="en-US" sz="850" dirty="0"/>
+          </a:p>
+        </p:txBody>
+      </p:sp>
+    </p:spTree>
+  </p:cSld>
+  <p:clrMapOvr>
+    <a:masterClrMapping/>
+  </p:clrMapOvr>
+</p:sld>
+</file>
+
+<file path=ppt/slides/slide8.xml><?xml version="1.0" encoding="utf-8"?>
+<p:sld xmlns:a="http://schemas.openxmlformats.org/drawingml/2006/main" xmlns:p="http://schemas.openxmlformats.org/presentationml/2006/main" xmlns:r="http://schemas.openxmlformats.org/officeDocument/2006/relationships">
+  <p:cSld>
+    <p:spTree>
+      <p:nvGrpSpPr>
+        <p:cNvPr id="1" name=""/>
+        <p:cNvGrpSpPr/>
+        <p:nvPr/>
+      </p:nvGrpSpPr>
+      <p:grpSpPr/>
+      <p:sp>
+        <p:nvSpPr>
+          <p:cNvPr id="2" name="Title 1"/>
+          <p:cNvSpPr>
+            <a:spLocks noGrp="1"/>
+          </p:cNvSpPr>
+          <p:nvPr>
+            <p:ph type="title"/>
+          </p:nvPr>
+        </p:nvSpPr>
+        <p:spPr/>
+        <p:txBody>
+          <a:bodyPr/>
+          <a:lstStyle/>
+          <a:p>
+            <a:r>
+              <a:rPr sz="2500">
+                <a:latin typeface="Paperlogy 7 Bold"/>
+                <a:ea typeface="Paperlogy 7 Bold"/>
+                <a:cs typeface="Paperlogy 7 Bold"/>
+              </a:rPr>
+              <a:t>부록 — 성수대교 산출 결과</a:t>
+            </a:r>
+          </a:p>
+        </p:txBody>
+      </p:sp>
+      <p:sp>
+        <p:nvSpPr>
+          <p:cNvPr id="3" name="Rectangle 2"/>
+          <p:cNvSpPr/>
+          <p:nvPr/>
+        </p:nvSpPr>
+        <p:spPr>
+          <a:xfrm>
+            <a:off x="10948111" y="0"/>
+            <a:ext cx="1206094" cy="592531"/>
+          </a:xfrm>
+          <a:prstGeom prst="rect">
+            <a:avLst/>
+          </a:prstGeom>
+          <a:solidFill>
+            <a:srgbClr val="F5F7F9"/>
+          </a:solidFill>
+          <a:ln>
+            <a:noFill/>
+          </a:ln>
+          <a:effectLst/>
+        </p:spPr>
+        <p:style>
+          <a:lnRef idx="1">
+            <a:schemeClr val="accent1"/>
+          </a:lnRef>
+          <a:fillRef idx="3">
+            <a:schemeClr val="accent1"/>
+          </a:fillRef>
+          <a:effectRef idx="2">
+            <a:schemeClr val="accent1"/>
+          </a:effectRef>
+          <a:fontRef idx="minor">
+            <a:schemeClr val="lt1"/>
+          </a:fontRef>
+        </p:style>
+        <p:txBody>
+          <a:bodyPr rtlCol="0" anchor="ctr"/>
+          <a:lstStyle/>
+          <a:p>
+            <a:pPr algn="ctr"/>
+          </a:p>
+        </p:txBody>
+      </p:sp>
+      <p:pic>
+        <p:nvPicPr>
+          <p:cNvPr id="4" name="Picture 3" descr="image.png"/>
+          <p:cNvPicPr>
+            <a:picLocks noChangeAspect="1"/>
+          </p:cNvPicPr>
+          <p:nvPr/>
+        </p:nvPicPr>
+        <p:blipFill>
+          <a:blip r:embed="rId2"/>
+          <a:stretch>
+            <a:fillRect/>
+          </a:stretch>
+        </p:blipFill>
+        <p:spPr>
+          <a:xfrm>
+            <a:off x="10419588" y="9144"/>
+            <a:ext cx="1750162" cy="373075"/>
+          </a:xfrm>
+          <a:prstGeom prst="rect">
+            <a:avLst/>
+          </a:prstGeom>
+        </p:spPr>
+      </p:pic>
+      <p:sp>
+        <p:nvSpPr>
+          <p:cNvPr id="5" name="TextBox 4"/>
+          <p:cNvSpPr txBox="1"/>
+          <p:nvPr/>
+        </p:nvSpPr>
+        <p:spPr>
+          <a:xfrm>
+            <a:off x="41148" y="168250"/>
+            <a:ext cx="633679" cy="465430"/>
+          </a:xfrm>
+          <a:prstGeom prst="rect">
+            <a:avLst/>
+          </a:prstGeom>
+          <a:noFill/>
+        </p:spPr>
+        <p:txBody>
+          <a:bodyPr wrap="none" anchor="ctr" lIns="0" rIns="0" tIns="0" bIns="0">
+            <a:spAutoFit/>
+          </a:bodyPr>
+          <a:lstStyle/>
+          <a:p>
+            <a:pPr algn="ctr">
+              <a:lnSpc>
+                <a:spcPct val="100000"/>
+              </a:lnSpc>
+            </a:pPr>
+            <a:r>
+              <a:rPr sz="2200" b="1">
+                <a:solidFill>
+                  <a:srgbClr val="FFFFFF"/>
+                </a:solidFill>
+                <a:latin typeface="Paperlogy 7 Bold"/>
+                <a:ea typeface="Paperlogy 7 Bold"/>
+                <a:cs typeface="Paperlogy 7 Bold"/>
+              </a:rPr>
+              <a:t>부록</a:t>
+            </a:r>
+          </a:p>
+        </p:txBody>
+      </p:sp>
+      <p:sp>
+        <p:nvSpPr>
+          <p:cNvPr id="6" name="Rectangle 5"/>
+          <p:cNvSpPr/>
+          <p:nvPr/>
+        </p:nvSpPr>
+        <p:spPr>
+          <a:xfrm>
+            <a:off x="0" y="6656832"/>
+            <a:ext cx="2733142" cy="180137"/>
+          </a:xfrm>
+          <a:prstGeom prst="rect">
+            <a:avLst/>
+          </a:prstGeom>
+          <a:solidFill>
+            <a:srgbClr val="E9EBEE"/>
+          </a:solidFill>
+          <a:ln>
+            <a:noFill/>
+          </a:ln>
+          <a:effectLst/>
+        </p:spPr>
+        <p:style>
+          <a:lnRef idx="1">
+            <a:schemeClr val="accent1"/>
+          </a:lnRef>
+          <a:fillRef idx="3">
+            <a:schemeClr val="accent1"/>
+          </a:fillRef>
+          <a:effectRef idx="2">
+            <a:schemeClr val="accent1"/>
+          </a:effectRef>
+          <a:fontRef idx="minor">
+            <a:schemeClr val="lt1"/>
+          </a:fontRef>
+        </p:style>
+        <p:txBody>
+          <a:bodyPr rtlCol="0" anchor="ctr"/>
+          <a:lstStyle/>
+          <a:p>
+            <a:pPr algn="ctr"/>
+          </a:p>
+        </p:txBody>
+      </p:sp>
+      <p:sp>
+        <p:nvSpPr>
+          <p:cNvPr id="7" name="TextBox 6"/>
+          <p:cNvSpPr txBox="1"/>
+          <p:nvPr/>
+        </p:nvSpPr>
+        <p:spPr>
+          <a:xfrm>
+            <a:off x="109728" y="6656832"/>
+            <a:ext cx="2560320" cy="180137"/>
+          </a:xfrm>
+          <a:prstGeom prst="rect">
+            <a:avLst/>
+          </a:prstGeom>
+          <a:noFill/>
+        </p:spPr>
+        <p:txBody>
+          <a:bodyPr wrap="square" anchor="ctr" lIns="0" rIns="0" tIns="0" bIns="0">
+            <a:spAutoFit/>
+          </a:bodyPr>
+          <a:lstStyle/>
+          <a:p>
+            <a:pPr algn="l">
+              <a:lnSpc>
+                <a:spcPct val="100000"/>
+              </a:lnSpc>
+            </a:pPr>
+            <a:r>
+              <a:rPr sz="1200" b="1">
+                <a:solidFill>
+                  <a:srgbClr val="373D47"/>
+                </a:solidFill>
+                <a:latin typeface="Paperlogy 7 Bold"/>
+                <a:ea typeface="Paperlogy 7 Bold"/>
+                <a:cs typeface="Paperlogy 7 Bold"/>
+              </a:rPr>
+              <a:t>2026 KAIA 자문회의</a:t>
+            </a:r>
+          </a:p>
+        </p:txBody>
+      </p:sp>
+      <p:sp>
+        <p:nvSpPr>
+          <p:cNvPr id="8" name="Rectangle 7"/>
+          <p:cNvSpPr/>
+          <p:nvPr/>
+        </p:nvSpPr>
+        <p:spPr>
+          <a:xfrm>
+            <a:off x="301752" y="758952"/>
+            <a:ext cx="54864" cy="274320"/>
+          </a:xfrm>
+          <a:prstGeom prst="rect">
+            <a:avLst/>
+          </a:prstGeom>
+          <a:solidFill>
+            <a:srgbClr val="1C5B8A"/>
+          </a:solidFill>
+          <a:ln>
+            <a:noFill/>
+          </a:ln>
+          <a:effectLst/>
+        </p:spPr>
+        <p:style>
+          <a:lnRef idx="1">
+            <a:schemeClr val="accent1"/>
+          </a:lnRef>
+          <a:fillRef idx="3">
+            <a:schemeClr val="accent1"/>
+          </a:fillRef>
+          <a:effectRef idx="2">
+            <a:schemeClr val="accent1"/>
+          </a:effectRef>
+          <a:fontRef idx="minor">
+            <a:schemeClr val="lt1"/>
+          </a:fontRef>
+        </p:style>
+        <p:txBody>
+          <a:bodyPr rtlCol="0" anchor="ctr"/>
+          <a:lstStyle/>
+          <a:p>
+            <a:pPr algn="ctr"/>
+          </a:p>
+        </p:txBody>
+      </p:sp>
+      <p:sp>
+        <p:nvSpPr>
+          <p:cNvPr id="9" name="TextBox 8"/>
+          <p:cNvSpPr txBox="1"/>
+          <p:nvPr/>
+        </p:nvSpPr>
+        <p:spPr>
+          <a:xfrm>
+            <a:off x="438912" y="722376"/>
+            <a:ext cx="11338560" cy="347472"/>
+          </a:xfrm>
+          <a:prstGeom prst="rect">
+            <a:avLst/>
+          </a:prstGeom>
+          <a:noFill/>
+        </p:spPr>
+        <p:txBody>
+          <a:bodyPr wrap="square" anchor="t" lIns="0" rIns="0" tIns="0" bIns="0">
+            <a:spAutoFit/>
+          </a:bodyPr>
+          <a:lstStyle/>
+          <a:p>
+            <a:pPr algn="l">
+              <a:lnSpc>
+                <a:spcPct val="100000"/>
+              </a:lnSpc>
+            </a:pPr>
+            <a:r>
+              <a:rPr sz="1450" b="1">
+                <a:solidFill>
+                  <a:srgbClr val="10171E"/>
+                </a:solidFill>
+                <a:latin typeface="Paperlogy 7 Bold"/>
+                <a:ea typeface="Paperlogy 7 Bold"/>
+                <a:cs typeface="Paperlogy 7 Bold"/>
+              </a:rPr>
+              <a:t>관측 101회 · 교면 측점 15점 — 열팽창으로 교면과 지반이 갈라진 사례</a:t>
+            </a:r>
+          </a:p>
+        </p:txBody>
+      </p:sp>
+      <p:sp>
+        <p:nvSpPr>
+          <p:cNvPr id="10" name="Rectangle 9"/>
+          <p:cNvSpPr/>
+          <p:nvPr/>
+        </p:nvSpPr>
+        <p:spPr>
+          <a:xfrm>
+            <a:off x="411480" y="1280160"/>
+            <a:ext cx="5577840" cy="2066544"/>
+          </a:xfrm>
+          <a:prstGeom prst="rect">
+            <a:avLst/>
+          </a:prstGeom>
+          <a:solidFill>
+            <a:srgbClr val="FFFFFF"/>
+          </a:solidFill>
+          <a:ln w="12700">
+            <a:solidFill>
+              <a:srgbClr val="E9EBEE"/>
+            </a:solidFill>
+          </a:ln>
+          <a:effectLst/>
+        </p:spPr>
+        <p:style>
+          <a:lnRef idx="1">
+            <a:schemeClr val="accent1"/>
+          </a:lnRef>
+          <a:fillRef idx="3">
+            <a:schemeClr val="accent1"/>
+          </a:fillRef>
+          <a:effectRef idx="2">
+            <a:schemeClr val="accent1"/>
+          </a:effectRef>
+          <a:fontRef idx="minor">
+            <a:schemeClr val="lt1"/>
+          </a:fontRef>
+        </p:style>
+        <p:txBody>
+          <a:bodyPr rtlCol="0" anchor="ctr"/>
+          <a:lstStyle/>
+          <a:p>
+            <a:pPr algn="ctr"/>
+          </a:p>
+        </p:txBody>
+      </p:sp>
+      <p:sp>
+        <p:nvSpPr>
+          <p:cNvPr id="11" name="Rectangle 10"/>
+          <p:cNvSpPr/>
+          <p:nvPr/>
+        </p:nvSpPr>
+        <p:spPr>
+          <a:xfrm>
+            <a:off x="2260854" y="1138428"/>
+            <a:ext cx="1879092" cy="283464"/>
+          </a:xfrm>
+          <a:prstGeom prst="rect">
+            <a:avLst/>
+          </a:prstGeom>
+          <a:solidFill>
+            <a:srgbClr val="373D47"/>
+          </a:solidFill>
+          <a:ln>
+            <a:noFill/>
+          </a:ln>
+          <a:effectLst/>
+        </p:spPr>
+        <p:style>
+          <a:lnRef idx="1">
+            <a:schemeClr val="accent1"/>
+          </a:lnRef>
+          <a:fillRef idx="3">
+            <a:schemeClr val="accent1"/>
+          </a:fillRef>
+          <a:effectRef idx="2">
+            <a:schemeClr val="accent1"/>
+          </a:effectRef>
+          <a:fontRef idx="minor">
+            <a:schemeClr val="lt1"/>
+          </a:fontRef>
+        </p:style>
+        <p:txBody>
+          <a:bodyPr rtlCol="0" anchor="ctr"/>
+          <a:lstStyle/>
+          <a:p>
+            <a:pPr algn="ctr"/>
+          </a:p>
+        </p:txBody>
+      </p:sp>
+      <p:sp>
+        <p:nvSpPr>
+          <p:cNvPr id="12" name="TextBox 11"/>
+          <p:cNvSpPr txBox="1"/>
+          <p:nvPr/>
+        </p:nvSpPr>
+        <p:spPr>
+          <a:xfrm>
+            <a:off x="2260854" y="1138428"/>
+            <a:ext cx="1879092" cy="283464"/>
+          </a:xfrm>
+          <a:prstGeom prst="rect">
+            <a:avLst/>
+          </a:prstGeom>
+          <a:noFill/>
+        </p:spPr>
+        <p:txBody>
+          <a:bodyPr wrap="square" anchor="ctr" lIns="0" rIns="0" tIns="0" bIns="0">
+            <a:spAutoFit/>
+          </a:bodyPr>
+          <a:lstStyle/>
+          <a:p>
+            <a:pPr algn="ctr">
+              <a:lnSpc>
+                <a:spcPct val="100000"/>
+              </a:lnSpc>
+            </a:pPr>
+            <a:r>
+              <a:rPr sz="1250" b="1">
+                <a:solidFill>
+                  <a:srgbClr val="FFFFFF"/>
+                </a:solidFill>
+                <a:latin typeface="Paperlogy 7 Bold"/>
+                <a:ea typeface="Paperlogy 7 Bold"/>
+                <a:cs typeface="Paperlogy 7 Bold"/>
+              </a:rPr>
+              <a:t>처리 — MT-InSAR</a:t>
+            </a:r>
+          </a:p>
+        </p:txBody>
+      </p:sp>
+      <p:sp>
+        <p:nvSpPr>
+          <p:cNvPr id="13" name="Rectangle 12"/>
+          <p:cNvSpPr/>
+          <p:nvPr/>
+        </p:nvSpPr>
+        <p:spPr>
+          <a:xfrm>
+            <a:off x="576072" y="1746504"/>
+            <a:ext cx="41148" cy="164592"/>
+          </a:xfrm>
+          <a:prstGeom prst="rect">
+            <a:avLst/>
+          </a:prstGeom>
+          <a:solidFill>
+            <a:srgbClr val="1C5B8A"/>
+          </a:solidFill>
+          <a:ln>
+            <a:noFill/>
+          </a:ln>
+          <a:effectLst/>
+        </p:spPr>
+        <p:style>
+          <a:lnRef idx="1">
+            <a:schemeClr val="accent1"/>
+          </a:lnRef>
+          <a:fillRef idx="3">
+            <a:schemeClr val="accent1"/>
+          </a:fillRef>
+          <a:effectRef idx="2">
+            <a:schemeClr val="accent1"/>
+          </a:effectRef>
+          <a:fontRef idx="minor">
+            <a:schemeClr val="lt1"/>
+          </a:fontRef>
+        </p:style>
+        <p:txBody>
+          <a:bodyPr rtlCol="0" anchor="ctr"/>
+          <a:lstStyle/>
+          <a:p>
+            <a:pPr algn="ctr"/>
+          </a:p>
+        </p:txBody>
+      </p:sp>
+      <p:sp>
+        <p:nvSpPr>
+          <p:cNvPr id="14" name="TextBox 13"/>
+          <p:cNvSpPr txBox="1"/>
+          <p:nvPr/>
+        </p:nvSpPr>
+        <p:spPr>
+          <a:xfrm>
+            <a:off x="704088" y="1682496"/>
+            <a:ext cx="1143000" cy="201168"/>
+          </a:xfrm>
+          <a:prstGeom prst="rect">
+            <a:avLst/>
+          </a:prstGeom>
+          <a:noFill/>
+        </p:spPr>
+        <p:txBody>
+          <a:bodyPr wrap="square" anchor="t" lIns="0" rIns="0" tIns="0" bIns="0">
+            <a:spAutoFit/>
+          </a:bodyPr>
+          <a:lstStyle/>
+          <a:p>
+            <a:pPr algn="l">
+              <a:lnSpc>
+                <a:spcPct val="100000"/>
+              </a:lnSpc>
+            </a:pPr>
+            <a:r>
+              <a:rPr sz="1000" b="1">
+                <a:solidFill>
+                  <a:srgbClr val="10171E"/>
+                </a:solidFill>
+                <a:latin typeface="Paperlogy 7 Bold"/>
+                <a:ea typeface="Paperlogy 7 Bold"/>
+                <a:cs typeface="Paperlogy 7 Bold"/>
+              </a:rPr>
+              <a:t>관측</a:t>
+            </a:r>
+          </a:p>
+        </p:txBody>
+      </p:sp>
+      <p:sp>
+        <p:nvSpPr>
+          <p:cNvPr id="15" name="TextBox 14"/>
+          <p:cNvSpPr txBox="1"/>
+          <p:nvPr/>
+        </p:nvSpPr>
+        <p:spPr>
+          <a:xfrm>
+            <a:off x="1874520" y="1682496"/>
+            <a:ext cx="3913632" cy="365760"/>
+          </a:xfrm>
+          <a:prstGeom prst="rect">
+            <a:avLst/>
+          </a:prstGeom>
+          <a:noFill/>
+        </p:spPr>
+        <p:txBody>
+          <a:bodyPr wrap="square" anchor="t" lIns="0" rIns="0" tIns="0" bIns="0">
+            <a:spAutoFit/>
+          </a:bodyPr>
+          <a:lstStyle/>
+          <a:p>
+            <a:pPr algn="l">
+              <a:lnSpc>
+                <a:spcPct val="100000"/>
+              </a:lnSpc>
+            </a:pPr>
+            <a:r>
+              <a:rPr sz="940" b="0">
+                <a:solidFill>
+                  <a:srgbClr val="373D47"/>
+                </a:solidFill>
+                <a:latin typeface="Paperlogy 5 Medium"/>
+                <a:ea typeface="Paperlogy 5 Medium"/>
+                <a:cs typeface="Paperlogy 5 Medium"/>
+              </a:rPr>
+              <a:t>101회 · 2018-06 ~ 2025-12</a:t>
+            </a:r>
+          </a:p>
+        </p:txBody>
+      </p:sp>
+      <p:sp>
+        <p:nvSpPr>
+          <p:cNvPr id="16" name="Rectangle 15"/>
+          <p:cNvSpPr/>
+          <p:nvPr/>
+        </p:nvSpPr>
+        <p:spPr>
+          <a:xfrm>
+            <a:off x="576072" y="2130552"/>
+            <a:ext cx="41148" cy="164592"/>
+          </a:xfrm>
+          <a:prstGeom prst="rect">
+            <a:avLst/>
+          </a:prstGeom>
+          <a:solidFill>
+            <a:srgbClr val="1C5B8A"/>
+          </a:solidFill>
+          <a:ln>
+            <a:noFill/>
+          </a:ln>
+          <a:effectLst/>
+        </p:spPr>
+        <p:style>
+          <a:lnRef idx="1">
+            <a:schemeClr val="accent1"/>
+          </a:lnRef>
+          <a:fillRef idx="3">
+            <a:schemeClr val="accent1"/>
+          </a:fillRef>
+          <a:effectRef idx="2">
+            <a:schemeClr val="accent1"/>
+          </a:effectRef>
+          <a:fontRef idx="minor">
+            <a:schemeClr val="lt1"/>
+          </a:fontRef>
+        </p:style>
+        <p:txBody>
+          <a:bodyPr rtlCol="0" anchor="ctr"/>
+          <a:lstStyle/>
+          <a:p>
+            <a:pPr algn="ctr"/>
+          </a:p>
+        </p:txBody>
+      </p:sp>
+      <p:sp>
+        <p:nvSpPr>
+          <p:cNvPr id="17" name="TextBox 16"/>
+          <p:cNvSpPr txBox="1"/>
+          <p:nvPr/>
+        </p:nvSpPr>
+        <p:spPr>
+          <a:xfrm>
+            <a:off x="704088" y="2066544"/>
+            <a:ext cx="1143000" cy="201168"/>
+          </a:xfrm>
+          <a:prstGeom prst="rect">
+            <a:avLst/>
+          </a:prstGeom>
+          <a:noFill/>
+        </p:spPr>
+        <p:txBody>
+          <a:bodyPr wrap="square" anchor="t" lIns="0" rIns="0" tIns="0" bIns="0">
+            <a:spAutoFit/>
+          </a:bodyPr>
+          <a:lstStyle/>
+          <a:p>
+            <a:pPr algn="l">
+              <a:lnSpc>
+                <a:spcPct val="100000"/>
+              </a:lnSpc>
+            </a:pPr>
+            <a:r>
+              <a:rPr sz="1000" b="1">
+                <a:solidFill>
+                  <a:srgbClr val="10171E"/>
+                </a:solidFill>
+                <a:latin typeface="Paperlogy 7 Bold"/>
+                <a:ea typeface="Paperlogy 7 Bold"/>
+                <a:cs typeface="Paperlogy 7 Bold"/>
+              </a:rPr>
+              <a:t>기선망</a:t>
+            </a:r>
+          </a:p>
+        </p:txBody>
+      </p:sp>
+      <p:sp>
+        <p:nvSpPr>
+          <p:cNvPr id="18" name="TextBox 17"/>
+          <p:cNvSpPr txBox="1"/>
+          <p:nvPr/>
+        </p:nvSpPr>
+        <p:spPr>
+          <a:xfrm>
+            <a:off x="1874520" y="2066544"/>
+            <a:ext cx="3913632" cy="365760"/>
+          </a:xfrm>
+          <a:prstGeom prst="rect">
+            <a:avLst/>
+          </a:prstGeom>
+          <a:noFill/>
+        </p:spPr>
+        <p:txBody>
+          <a:bodyPr wrap="square" anchor="t" lIns="0" rIns="0" tIns="0" bIns="0">
+            <a:spAutoFit/>
+          </a:bodyPr>
+          <a:lstStyle/>
+          <a:p>
+            <a:pPr algn="l">
+              <a:lnSpc>
+                <a:spcPct val="100000"/>
+              </a:lnSpc>
+            </a:pPr>
+            <a:r>
+              <a:rPr sz="940" b="0">
+                <a:solidFill>
+                  <a:srgbClr val="373D47"/>
+                </a:solidFill>
+                <a:latin typeface="Paperlogy 5 Medium"/>
+                <a:ea typeface="Paperlogy 5 Medium"/>
+                <a:cs typeface="Paperlogy 5 Medium"/>
+              </a:rPr>
+              <a:t>쌍 1125개 · 연결됨 · 수직기선 -240 ~ +219 m</a:t>
+            </a:r>
+          </a:p>
+        </p:txBody>
+      </p:sp>
+      <p:sp>
+        <p:nvSpPr>
+          <p:cNvPr id="19" name="Rectangle 18"/>
+          <p:cNvSpPr/>
+          <p:nvPr/>
+        </p:nvSpPr>
+        <p:spPr>
+          <a:xfrm>
+            <a:off x="576072" y="2514600"/>
+            <a:ext cx="41148" cy="164592"/>
+          </a:xfrm>
+          <a:prstGeom prst="rect">
+            <a:avLst/>
+          </a:prstGeom>
+          <a:solidFill>
+            <a:srgbClr val="1C5B8A"/>
+          </a:solidFill>
+          <a:ln>
+            <a:noFill/>
+          </a:ln>
+          <a:effectLst/>
+        </p:spPr>
+        <p:style>
+          <a:lnRef idx="1">
+            <a:schemeClr val="accent1"/>
+          </a:lnRef>
+          <a:fillRef idx="3">
+            <a:schemeClr val="accent1"/>
+          </a:fillRef>
+          <a:effectRef idx="2">
+            <a:schemeClr val="accent1"/>
+          </a:effectRef>
+          <a:fontRef idx="minor">
+            <a:schemeClr val="lt1"/>
+          </a:fontRef>
+        </p:style>
+        <p:txBody>
+          <a:bodyPr rtlCol="0" anchor="ctr"/>
+          <a:lstStyle/>
+          <a:p>
+            <a:pPr algn="ctr"/>
+          </a:p>
+        </p:txBody>
+      </p:sp>
+      <p:sp>
+        <p:nvSpPr>
+          <p:cNvPr id="20" name="TextBox 19"/>
+          <p:cNvSpPr txBox="1"/>
+          <p:nvPr/>
+        </p:nvSpPr>
+        <p:spPr>
+          <a:xfrm>
+            <a:off x="704088" y="2450592"/>
+            <a:ext cx="1143000" cy="201168"/>
+          </a:xfrm>
+          <a:prstGeom prst="rect">
+            <a:avLst/>
+          </a:prstGeom>
+          <a:noFill/>
+        </p:spPr>
+        <p:txBody>
+          <a:bodyPr wrap="square" anchor="t" lIns="0" rIns="0" tIns="0" bIns="0">
+            <a:spAutoFit/>
+          </a:bodyPr>
+          <a:lstStyle/>
+          <a:p>
+            <a:pPr algn="l">
+              <a:lnSpc>
+                <a:spcPct val="100000"/>
+              </a:lnSpc>
+            </a:pPr>
+            <a:r>
+              <a:rPr sz="1000" b="1">
+                <a:solidFill>
+                  <a:srgbClr val="10171E"/>
+                </a:solidFill>
+                <a:latin typeface="Paperlogy 7 Bold"/>
+                <a:ea typeface="Paperlogy 7 Bold"/>
+                <a:cs typeface="Paperlogy 7 Bold"/>
+              </a:rPr>
+              <a:t>측점</a:t>
+            </a:r>
+          </a:p>
+        </p:txBody>
+      </p:sp>
+      <p:sp>
+        <p:nvSpPr>
+          <p:cNvPr id="21" name="TextBox 20"/>
+          <p:cNvSpPr txBox="1"/>
+          <p:nvPr/>
+        </p:nvSpPr>
+        <p:spPr>
+          <a:xfrm>
+            <a:off x="1874520" y="2450592"/>
+            <a:ext cx="3913632" cy="365760"/>
+          </a:xfrm>
+          <a:prstGeom prst="rect">
+            <a:avLst/>
+          </a:prstGeom>
+          <a:noFill/>
+        </p:spPr>
+        <p:txBody>
+          <a:bodyPr wrap="square" anchor="t" lIns="0" rIns="0" tIns="0" bIns="0">
+            <a:spAutoFit/>
+          </a:bodyPr>
+          <a:lstStyle/>
+          <a:p>
+            <a:pPr algn="l">
+              <a:lnSpc>
+                <a:spcPct val="100000"/>
+              </a:lnSpc>
+            </a:pPr>
+            <a:r>
+              <a:rPr sz="940" b="0">
+                <a:solidFill>
+                  <a:srgbClr val="373D47"/>
+                </a:solidFill>
+                <a:latin typeface="Paperlogy 5 Medium"/>
+                <a:ea typeface="Paperlogy 5 Medium"/>
+                <a:cs typeface="Paperlogy 5 Medium"/>
+              </a:rPr>
+              <a:t>536점 중 γ≥0.35 를 넘은 204점 · 잔차고도 σΔh 8.4 m</a:t>
+            </a:r>
+          </a:p>
+        </p:txBody>
+      </p:sp>
+      <p:sp>
+        <p:nvSpPr>
+          <p:cNvPr id="22" name="Rectangle 21"/>
+          <p:cNvSpPr/>
+          <p:nvPr/>
+        </p:nvSpPr>
+        <p:spPr>
+          <a:xfrm>
+            <a:off x="576072" y="2898648"/>
+            <a:ext cx="41148" cy="164592"/>
+          </a:xfrm>
+          <a:prstGeom prst="rect">
+            <a:avLst/>
+          </a:prstGeom>
+          <a:solidFill>
+            <a:srgbClr val="1C5B8A"/>
+          </a:solidFill>
+          <a:ln>
+            <a:noFill/>
+          </a:ln>
+          <a:effectLst/>
+        </p:spPr>
+        <p:style>
+          <a:lnRef idx="1">
+            <a:schemeClr val="accent1"/>
+          </a:lnRef>
+          <a:fillRef idx="3">
+            <a:schemeClr val="accent1"/>
+          </a:fillRef>
+          <a:effectRef idx="2">
+            <a:schemeClr val="accent1"/>
+          </a:effectRef>
+          <a:fontRef idx="minor">
+            <a:schemeClr val="lt1"/>
+          </a:fontRef>
+        </p:style>
+        <p:txBody>
+          <a:bodyPr rtlCol="0" anchor="ctr"/>
+          <a:lstStyle/>
+          <a:p>
+            <a:pPr algn="ctr"/>
+          </a:p>
+        </p:txBody>
+      </p:sp>
+      <p:sp>
+        <p:nvSpPr>
+          <p:cNvPr id="23" name="TextBox 22"/>
+          <p:cNvSpPr txBox="1"/>
+          <p:nvPr/>
+        </p:nvSpPr>
+        <p:spPr>
+          <a:xfrm>
+            <a:off x="704088" y="2834640"/>
+            <a:ext cx="1143000" cy="201168"/>
+          </a:xfrm>
+          <a:prstGeom prst="rect">
+            <a:avLst/>
+          </a:prstGeom>
+          <a:noFill/>
+        </p:spPr>
+        <p:txBody>
+          <a:bodyPr wrap="square" anchor="t" lIns="0" rIns="0" tIns="0" bIns="0">
+            <a:spAutoFit/>
+          </a:bodyPr>
+          <a:lstStyle/>
+          <a:p>
+            <a:pPr algn="l">
+              <a:lnSpc>
+                <a:spcPct val="100000"/>
+              </a:lnSpc>
+            </a:pPr>
+            <a:r>
+              <a:rPr sz="1000" b="1">
+                <a:solidFill>
+                  <a:srgbClr val="10171E"/>
+                </a:solidFill>
+                <a:latin typeface="Paperlogy 7 Bold"/>
+                <a:ea typeface="Paperlogy 7 Bold"/>
+                <a:cs typeface="Paperlogy 7 Bold"/>
+              </a:rPr>
+              <a:t>APS 제거</a:t>
+            </a:r>
+          </a:p>
+        </p:txBody>
+      </p:sp>
+      <p:sp>
+        <p:nvSpPr>
+          <p:cNvPr id="24" name="TextBox 23"/>
+          <p:cNvSpPr txBox="1"/>
+          <p:nvPr/>
+        </p:nvSpPr>
+        <p:spPr>
+          <a:xfrm>
+            <a:off x="1874520" y="2834640"/>
+            <a:ext cx="3913632" cy="365760"/>
+          </a:xfrm>
+          <a:prstGeom prst="rect">
+            <a:avLst/>
+          </a:prstGeom>
+          <a:noFill/>
+        </p:spPr>
+        <p:txBody>
+          <a:bodyPr wrap="square" anchor="t" lIns="0" rIns="0" tIns="0" bIns="0">
+            <a:spAutoFit/>
+          </a:bodyPr>
+          <a:lstStyle/>
+          <a:p>
+            <a:pPr algn="l">
+              <a:lnSpc>
+                <a:spcPct val="100000"/>
+              </a:lnSpc>
+            </a:pPr>
+            <a:r>
+              <a:rPr sz="940" b="0">
+                <a:solidFill>
+                  <a:srgbClr val="373D47"/>
+                </a:solidFill>
+                <a:latin typeface="Paperlogy 5 Medium"/>
+                <a:ea typeface="Paperlogy 5 Medium"/>
+                <a:cs typeface="Paperlogy 5 Medium"/>
+              </a:rPr>
+              <a:t>RMS 2.8 mm · 잔차 16.3 → 11.2 mm</a:t>
+            </a:r>
+          </a:p>
+        </p:txBody>
+      </p:sp>
+      <p:sp>
+        <p:nvSpPr>
+          <p:cNvPr id="25" name="Rectangle 24"/>
+          <p:cNvSpPr/>
+          <p:nvPr/>
+        </p:nvSpPr>
+        <p:spPr>
+          <a:xfrm>
+            <a:off x="6199632" y="1280160"/>
+            <a:ext cx="5577840" cy="2066544"/>
+          </a:xfrm>
+          <a:prstGeom prst="rect">
+            <a:avLst/>
+          </a:prstGeom>
+          <a:solidFill>
+            <a:srgbClr val="FFFFFF"/>
+          </a:solidFill>
+          <a:ln w="12700">
+            <a:solidFill>
+              <a:srgbClr val="E9EBEE"/>
+            </a:solidFill>
+          </a:ln>
+          <a:effectLst/>
+        </p:spPr>
+        <p:style>
+          <a:lnRef idx="1">
+            <a:schemeClr val="accent1"/>
+          </a:lnRef>
+          <a:fillRef idx="3">
+            <a:schemeClr val="accent1"/>
+          </a:fillRef>
+          <a:effectRef idx="2">
+            <a:schemeClr val="accent1"/>
+          </a:effectRef>
+          <a:fontRef idx="minor">
+            <a:schemeClr val="lt1"/>
+          </a:fontRef>
+        </p:style>
+        <p:txBody>
+          <a:bodyPr rtlCol="0" anchor="ctr"/>
+          <a:lstStyle/>
+          <a:p>
+            <a:pPr algn="ctr"/>
+          </a:p>
+        </p:txBody>
+      </p:sp>
+      <p:sp>
+        <p:nvSpPr>
+          <p:cNvPr id="26" name="Rectangle 25"/>
+          <p:cNvSpPr/>
+          <p:nvPr/>
+        </p:nvSpPr>
+        <p:spPr>
+          <a:xfrm>
+            <a:off x="8542782" y="1138428"/>
+            <a:ext cx="891540" cy="283464"/>
+          </a:xfrm>
+          <a:prstGeom prst="rect">
+            <a:avLst/>
+          </a:prstGeom>
+          <a:solidFill>
+            <a:srgbClr val="373D47"/>
+          </a:solidFill>
+          <a:ln>
+            <a:noFill/>
+          </a:ln>
+          <a:effectLst/>
+        </p:spPr>
+        <p:style>
+          <a:lnRef idx="1">
+            <a:schemeClr val="accent1"/>
+          </a:lnRef>
+          <a:fillRef idx="3">
+            <a:schemeClr val="accent1"/>
+          </a:fillRef>
+          <a:effectRef idx="2">
+            <a:schemeClr val="accent1"/>
+          </a:effectRef>
+          <a:fontRef idx="minor">
+            <a:schemeClr val="lt1"/>
+          </a:fontRef>
+        </p:style>
+        <p:txBody>
+          <a:bodyPr rtlCol="0" anchor="ctr"/>
+          <a:lstStyle/>
+          <a:p>
+            <a:pPr algn="ctr"/>
+          </a:p>
+        </p:txBody>
+      </p:sp>
+      <p:sp>
+        <p:nvSpPr>
+          <p:cNvPr id="27" name="TextBox 26"/>
+          <p:cNvSpPr txBox="1"/>
+          <p:nvPr/>
+        </p:nvSpPr>
+        <p:spPr>
+          <a:xfrm>
+            <a:off x="8542782" y="1138428"/>
+            <a:ext cx="891540" cy="283464"/>
+          </a:xfrm>
+          <a:prstGeom prst="rect">
+            <a:avLst/>
+          </a:prstGeom>
+          <a:noFill/>
+        </p:spPr>
+        <p:txBody>
+          <a:bodyPr wrap="square" anchor="ctr" lIns="0" rIns="0" tIns="0" bIns="0">
+            <a:spAutoFit/>
+          </a:bodyPr>
+          <a:lstStyle/>
+          <a:p>
+            <a:pPr algn="ctr">
+              <a:lnSpc>
+                <a:spcPct val="100000"/>
+              </a:lnSpc>
+            </a:pPr>
+            <a:r>
+              <a:rPr sz="1250" b="1">
+                <a:solidFill>
+                  <a:srgbClr val="FFFFFF"/>
+                </a:solidFill>
+                <a:latin typeface="Paperlogy 7 Bold"/>
+                <a:ea typeface="Paperlogy 7 Bold"/>
+                <a:cs typeface="Paperlogy 7 Bold"/>
+              </a:rPr>
+              <a:t>교면 결과</a:t>
+            </a:r>
+          </a:p>
+        </p:txBody>
+      </p:sp>
+      <p:sp>
+        <p:nvSpPr>
+          <p:cNvPr id="28" name="Rectangle 27"/>
+          <p:cNvSpPr/>
+          <p:nvPr/>
+        </p:nvSpPr>
+        <p:spPr>
+          <a:xfrm>
+            <a:off x="6364224" y="1746504"/>
+            <a:ext cx="41148" cy="164592"/>
+          </a:xfrm>
+          <a:prstGeom prst="rect">
+            <a:avLst/>
+          </a:prstGeom>
+          <a:solidFill>
+            <a:srgbClr val="1E7A54"/>
+          </a:solidFill>
+          <a:ln>
+            <a:noFill/>
+          </a:ln>
+          <a:effectLst/>
+        </p:spPr>
+        <p:style>
+          <a:lnRef idx="1">
+            <a:schemeClr val="accent1"/>
+          </a:lnRef>
+          <a:fillRef idx="3">
+            <a:schemeClr val="accent1"/>
+          </a:fillRef>
+          <a:effectRef idx="2">
+            <a:schemeClr val="accent1"/>
+          </a:effectRef>
+          <a:fontRef idx="minor">
+            <a:schemeClr val="lt1"/>
+          </a:fontRef>
+        </p:style>
+        <p:txBody>
+          <a:bodyPr rtlCol="0" anchor="ctr"/>
+          <a:lstStyle/>
+          <a:p>
+            <a:pPr algn="ctr"/>
+          </a:p>
+        </p:txBody>
+      </p:sp>
+      <p:sp>
+        <p:nvSpPr>
+          <p:cNvPr id="29" name="TextBox 28"/>
+          <p:cNvSpPr txBox="1"/>
+          <p:nvPr/>
+        </p:nvSpPr>
+        <p:spPr>
+          <a:xfrm>
+            <a:off x="6492240" y="1682496"/>
+            <a:ext cx="1143000" cy="201168"/>
+          </a:xfrm>
+          <a:prstGeom prst="rect">
+            <a:avLst/>
+          </a:prstGeom>
+          <a:noFill/>
+        </p:spPr>
+        <p:txBody>
+          <a:bodyPr wrap="square" anchor="t" lIns="0" rIns="0" tIns="0" bIns="0">
+            <a:spAutoFit/>
+          </a:bodyPr>
+          <a:lstStyle/>
+          <a:p>
+            <a:pPr algn="l">
+              <a:lnSpc>
+                <a:spcPct val="100000"/>
+              </a:lnSpc>
+            </a:pPr>
+            <a:r>
+              <a:rPr sz="1000" b="1">
+                <a:solidFill>
+                  <a:srgbClr val="10171E"/>
+                </a:solidFill>
+                <a:latin typeface="Paperlogy 7 Bold"/>
+                <a:ea typeface="Paperlogy 7 Bold"/>
+                <a:cs typeface="Paperlogy 7 Bold"/>
+              </a:rPr>
+              <a:t>교면 측점</a:t>
+            </a:r>
+          </a:p>
+        </p:txBody>
+      </p:sp>
+      <p:sp>
+        <p:nvSpPr>
+          <p:cNvPr id="30" name="TextBox 29"/>
+          <p:cNvSpPr txBox="1"/>
+          <p:nvPr/>
+        </p:nvSpPr>
+        <p:spPr>
+          <a:xfrm>
+            <a:off x="7662672" y="1682496"/>
+            <a:ext cx="3913632" cy="365760"/>
+          </a:xfrm>
+          <a:prstGeom prst="rect">
+            <a:avLst/>
+          </a:prstGeom>
+          <a:noFill/>
+        </p:spPr>
+        <p:txBody>
+          <a:bodyPr wrap="square" anchor="t" lIns="0" rIns="0" tIns="0" bIns="0">
+            <a:spAutoFit/>
+          </a:bodyPr>
+          <a:lstStyle/>
+          <a:p>
+            <a:pPr algn="l">
+              <a:lnSpc>
+                <a:spcPct val="100000"/>
+              </a:lnSpc>
+            </a:pPr>
+            <a:r>
+              <a:rPr sz="940" b="0">
+                <a:solidFill>
+                  <a:srgbClr val="373D47"/>
+                </a:solidFill>
+                <a:latin typeface="Paperlogy 5 Medium"/>
+                <a:ea typeface="Paperlogy 5 Medium"/>
+                <a:cs typeface="Paperlogy 5 Medium"/>
+              </a:rPr>
+              <a:t>15점 · 시간결맞음 γ 중앙 0.493 · 코히런스 0.668</a:t>
+            </a:r>
+          </a:p>
+        </p:txBody>
+      </p:sp>
+      <p:sp>
+        <p:nvSpPr>
+          <p:cNvPr id="31" name="Rectangle 30"/>
+          <p:cNvSpPr/>
+          <p:nvPr/>
+        </p:nvSpPr>
+        <p:spPr>
+          <a:xfrm>
+            <a:off x="6364224" y="2130552"/>
+            <a:ext cx="41148" cy="164592"/>
+          </a:xfrm>
+          <a:prstGeom prst="rect">
+            <a:avLst/>
+          </a:prstGeom>
+          <a:solidFill>
+            <a:srgbClr val="1E7A54"/>
+          </a:solidFill>
+          <a:ln>
+            <a:noFill/>
+          </a:ln>
+          <a:effectLst/>
+        </p:spPr>
+        <p:style>
+          <a:lnRef idx="1">
+            <a:schemeClr val="accent1"/>
+          </a:lnRef>
+          <a:fillRef idx="3">
+            <a:schemeClr val="accent1"/>
+          </a:fillRef>
+          <a:effectRef idx="2">
+            <a:schemeClr val="accent1"/>
+          </a:effectRef>
+          <a:fontRef idx="minor">
+            <a:schemeClr val="lt1"/>
+          </a:fontRef>
+        </p:style>
+        <p:txBody>
+          <a:bodyPr rtlCol="0" anchor="ctr"/>
+          <a:lstStyle/>
+          <a:p>
+            <a:pPr algn="ctr"/>
+          </a:p>
+        </p:txBody>
+      </p:sp>
+      <p:sp>
+        <p:nvSpPr>
+          <p:cNvPr id="32" name="TextBox 31"/>
+          <p:cNvSpPr txBox="1"/>
+          <p:nvPr/>
+        </p:nvSpPr>
+        <p:spPr>
+          <a:xfrm>
+            <a:off x="6492240" y="2066544"/>
+            <a:ext cx="1143000" cy="201168"/>
+          </a:xfrm>
+          <a:prstGeom prst="rect">
+            <a:avLst/>
+          </a:prstGeom>
+          <a:noFill/>
+        </p:spPr>
+        <p:txBody>
+          <a:bodyPr wrap="square" anchor="t" lIns="0" rIns="0" tIns="0" bIns="0">
+            <a:spAutoFit/>
+          </a:bodyPr>
+          <a:lstStyle/>
+          <a:p>
+            <a:pPr algn="l">
+              <a:lnSpc>
+                <a:spcPct val="100000"/>
+              </a:lnSpc>
+            </a:pPr>
+            <a:r>
+              <a:rPr sz="1000" b="1">
+                <a:solidFill>
+                  <a:srgbClr val="10171E"/>
+                </a:solidFill>
+                <a:latin typeface="Paperlogy 7 Bold"/>
+                <a:ea typeface="Paperlogy 7 Bold"/>
+                <a:cs typeface="Paperlogy 7 Bold"/>
+              </a:rPr>
+              <a:t>열팽창</a:t>
+            </a:r>
+          </a:p>
+        </p:txBody>
+      </p:sp>
+      <p:sp>
+        <p:nvSpPr>
+          <p:cNvPr id="33" name="TextBox 32"/>
+          <p:cNvSpPr txBox="1"/>
+          <p:nvPr/>
+        </p:nvSpPr>
+        <p:spPr>
+          <a:xfrm>
+            <a:off x="7662672" y="2066544"/>
+            <a:ext cx="3913632" cy="365760"/>
+          </a:xfrm>
+          <a:prstGeom prst="rect">
+            <a:avLst/>
+          </a:prstGeom>
+          <a:noFill/>
+        </p:spPr>
+        <p:txBody>
+          <a:bodyPr wrap="square" anchor="t" lIns="0" rIns="0" tIns="0" bIns="0">
+            <a:spAutoFit/>
+          </a:bodyPr>
+          <a:lstStyle/>
+          <a:p>
+            <a:pPr algn="l">
+              <a:lnSpc>
+                <a:spcPct val="100000"/>
+              </a:lnSpc>
+            </a:pPr>
+            <a:r>
+              <a:rPr sz="940" b="0">
+                <a:solidFill>
+                  <a:srgbClr val="373D47"/>
+                </a:solidFill>
+                <a:latin typeface="Paperlogy 5 Medium"/>
+                <a:ea typeface="Paperlogy 5 Medium"/>
+                <a:cs typeface="Paperlogy 5 Medium"/>
+              </a:rPr>
+              <a:t>교면 +0.15 vs 지반 +0.41 mm/°C — 갈라진다</a:t>
+            </a:r>
+          </a:p>
+        </p:txBody>
+      </p:sp>
+      <p:sp>
+        <p:nvSpPr>
+          <p:cNvPr id="34" name="Rectangle 33"/>
+          <p:cNvSpPr/>
+          <p:nvPr/>
+        </p:nvSpPr>
+        <p:spPr>
+          <a:xfrm>
+            <a:off x="6364224" y="2514600"/>
+            <a:ext cx="41148" cy="164592"/>
+          </a:xfrm>
+          <a:prstGeom prst="rect">
+            <a:avLst/>
+          </a:prstGeom>
+          <a:solidFill>
+            <a:srgbClr val="1E7A54"/>
+          </a:solidFill>
+          <a:ln>
+            <a:noFill/>
+          </a:ln>
+          <a:effectLst/>
+        </p:spPr>
+        <p:style>
+          <a:lnRef idx="1">
+            <a:schemeClr val="accent1"/>
+          </a:lnRef>
+          <a:fillRef idx="3">
+            <a:schemeClr val="accent1"/>
+          </a:fillRef>
+          <a:effectRef idx="2">
+            <a:schemeClr val="accent1"/>
+          </a:effectRef>
+          <a:fontRef idx="minor">
+            <a:schemeClr val="lt1"/>
+          </a:fontRef>
+        </p:style>
+        <p:txBody>
+          <a:bodyPr rtlCol="0" anchor="ctr"/>
+          <a:lstStyle/>
+          <a:p>
+            <a:pPr algn="ctr"/>
+          </a:p>
+        </p:txBody>
+      </p:sp>
+      <p:sp>
+        <p:nvSpPr>
+          <p:cNvPr id="35" name="TextBox 34"/>
+          <p:cNvSpPr txBox="1"/>
+          <p:nvPr/>
+        </p:nvSpPr>
+        <p:spPr>
+          <a:xfrm>
+            <a:off x="6492240" y="2450592"/>
+            <a:ext cx="1143000" cy="201168"/>
+          </a:xfrm>
+          <a:prstGeom prst="rect">
+            <a:avLst/>
+          </a:prstGeom>
+          <a:noFill/>
+        </p:spPr>
+        <p:txBody>
+          <a:bodyPr wrap="square" anchor="t" lIns="0" rIns="0" tIns="0" bIns="0">
+            <a:spAutoFit/>
+          </a:bodyPr>
+          <a:lstStyle/>
+          <a:p>
+            <a:pPr algn="l">
+              <a:lnSpc>
+                <a:spcPct val="100000"/>
+              </a:lnSpc>
+            </a:pPr>
+            <a:r>
+              <a:rPr sz="1000" b="1">
+                <a:solidFill>
+                  <a:srgbClr val="10171E"/>
+                </a:solidFill>
+                <a:latin typeface="Paperlogy 7 Bold"/>
+                <a:ea typeface="Paperlogy 7 Bold"/>
+                <a:cs typeface="Paperlogy 7 Bold"/>
+              </a:rPr>
+              <a:t>속도</a:t>
+            </a:r>
+          </a:p>
+        </p:txBody>
+      </p:sp>
+      <p:sp>
+        <p:nvSpPr>
+          <p:cNvPr id="36" name="TextBox 35"/>
+          <p:cNvSpPr txBox="1"/>
+          <p:nvPr/>
+        </p:nvSpPr>
+        <p:spPr>
+          <a:xfrm>
+            <a:off x="7662672" y="2450592"/>
+            <a:ext cx="3913632" cy="365760"/>
+          </a:xfrm>
+          <a:prstGeom prst="rect">
+            <a:avLst/>
+          </a:prstGeom>
+          <a:noFill/>
+        </p:spPr>
+        <p:txBody>
+          <a:bodyPr wrap="square" anchor="t" lIns="0" rIns="0" tIns="0" bIns="0">
+            <a:spAutoFit/>
+          </a:bodyPr>
+          <a:lstStyle/>
+          <a:p>
+            <a:pPr algn="l">
+              <a:lnSpc>
+                <a:spcPct val="100000"/>
+              </a:lnSpc>
+            </a:pPr>
+            <a:r>
+              <a:rPr sz="940" b="0">
+                <a:solidFill>
+                  <a:srgbClr val="373D47"/>
+                </a:solidFill>
+                <a:latin typeface="Paperlogy 5 Medium"/>
+                <a:ea typeface="Paperlogy 5 Medium"/>
+                <a:cs typeface="Paperlogy 5 Medium"/>
+              </a:rPr>
+              <a:t>중앙값 -0.05 mm/년</a:t>
+            </a:r>
+          </a:p>
+        </p:txBody>
+      </p:sp>
+      <p:sp>
+        <p:nvSpPr>
+          <p:cNvPr id="37" name="Rectangle 36"/>
+          <p:cNvSpPr/>
+          <p:nvPr/>
+        </p:nvSpPr>
+        <p:spPr>
+          <a:xfrm>
+            <a:off x="6364224" y="2898648"/>
+            <a:ext cx="41148" cy="164592"/>
+          </a:xfrm>
+          <a:prstGeom prst="rect">
+            <a:avLst/>
+          </a:prstGeom>
+          <a:solidFill>
+            <a:srgbClr val="1E7A54"/>
+          </a:solidFill>
+          <a:ln>
+            <a:noFill/>
+          </a:ln>
+          <a:effectLst/>
+        </p:spPr>
+        <p:style>
+          <a:lnRef idx="1">
+            <a:schemeClr val="accent1"/>
+          </a:lnRef>
+          <a:fillRef idx="3">
+            <a:schemeClr val="accent1"/>
+          </a:fillRef>
+          <a:effectRef idx="2">
+            <a:schemeClr val="accent1"/>
+          </a:effectRef>
+          <a:fontRef idx="minor">
+            <a:schemeClr val="lt1"/>
+          </a:fontRef>
+        </p:style>
+        <p:txBody>
+          <a:bodyPr rtlCol="0" anchor="ctr"/>
+          <a:lstStyle/>
+          <a:p>
+            <a:pPr algn="ctr"/>
+          </a:p>
+        </p:txBody>
+      </p:sp>
+      <p:sp>
+        <p:nvSpPr>
+          <p:cNvPr id="38" name="TextBox 37"/>
+          <p:cNvSpPr txBox="1"/>
+          <p:nvPr/>
+        </p:nvSpPr>
+        <p:spPr>
+          <a:xfrm>
+            <a:off x="6492240" y="2834640"/>
+            <a:ext cx="1143000" cy="201168"/>
+          </a:xfrm>
+          <a:prstGeom prst="rect">
+            <a:avLst/>
+          </a:prstGeom>
+          <a:noFill/>
+        </p:spPr>
+        <p:txBody>
+          <a:bodyPr wrap="square" anchor="t" lIns="0" rIns="0" tIns="0" bIns="0">
+            <a:spAutoFit/>
+          </a:bodyPr>
+          <a:lstStyle/>
+          <a:p>
+            <a:pPr algn="l">
+              <a:lnSpc>
+                <a:spcPct val="100000"/>
+              </a:lnSpc>
+            </a:pPr>
+            <a:r>
+              <a:rPr sz="1000" b="1">
+                <a:solidFill>
+                  <a:srgbClr val="10171E"/>
+                </a:solidFill>
+                <a:latin typeface="Paperlogy 7 Bold"/>
+                <a:ea typeface="Paperlogy 7 Bold"/>
+                <a:cs typeface="Paperlogy 7 Bold"/>
+              </a:rPr>
+              <a:t>위험 지수</a:t>
+            </a:r>
+          </a:p>
+        </p:txBody>
+      </p:sp>
+      <p:sp>
+        <p:nvSpPr>
+          <p:cNvPr id="39" name="TextBox 38"/>
+          <p:cNvSpPr txBox="1"/>
+          <p:nvPr/>
+        </p:nvSpPr>
+        <p:spPr>
+          <a:xfrm>
+            <a:off x="7662672" y="2834640"/>
+            <a:ext cx="3913632" cy="365760"/>
+          </a:xfrm>
+          <a:prstGeom prst="rect">
+            <a:avLst/>
+          </a:prstGeom>
+          <a:noFill/>
+        </p:spPr>
+        <p:txBody>
+          <a:bodyPr wrap="square" anchor="t" lIns="0" rIns="0" tIns="0" bIns="0">
+            <a:spAutoFit/>
+          </a:bodyPr>
+          <a:lstStyle/>
+          <a:p>
+            <a:pPr algn="l">
+              <a:lnSpc>
+                <a:spcPct val="100000"/>
+              </a:lnSpc>
+            </a:pPr>
+            <a:r>
+              <a:rPr sz="940" b="0">
+                <a:solidFill>
+                  <a:srgbClr val="373D47"/>
+                </a:solidFill>
+                <a:latin typeface="Paperlogy 5 Medium"/>
+                <a:ea typeface="Paperlogy 5 Medium"/>
+                <a:cs typeface="Paperlogy 5 Medium"/>
+              </a:rPr>
+              <a:t>측점 중앙 0.058 · 전역 0.70 (등급 기준은 잠정) · IFC 부재에 15점 결합</a:t>
+            </a:r>
+          </a:p>
+        </p:txBody>
+      </p:sp>
+      <p:sp>
+        <p:nvSpPr>
+          <p:cNvPr id="40" name="Rectangle 39"/>
+          <p:cNvSpPr/>
+          <p:nvPr/>
+        </p:nvSpPr>
+        <p:spPr>
+          <a:xfrm>
+            <a:off x="2199672" y="3474720"/>
+            <a:ext cx="7792351" cy="2761488"/>
+          </a:xfrm>
+          <a:prstGeom prst="rect">
+            <a:avLst/>
+          </a:prstGeom>
+          <a:solidFill>
+            <a:srgbClr val="F5F7F9"/>
+          </a:solidFill>
+          <a:ln w="12700">
+            <a:solidFill>
+              <a:srgbClr val="E9EBEE"/>
+            </a:solidFill>
+          </a:ln>
+          <a:effectLst/>
+        </p:spPr>
+        <p:style>
+          <a:lnRef idx="1">
+            <a:schemeClr val="accent1"/>
+          </a:lnRef>
+          <a:fillRef idx="3">
+            <a:schemeClr val="accent1"/>
+          </a:fillRef>
+          <a:effectRef idx="2">
+            <a:schemeClr val="accent1"/>
+          </a:effectRef>
+          <a:fontRef idx="minor">
+            <a:schemeClr val="lt1"/>
+          </a:fontRef>
+        </p:style>
+        <p:txBody>
+          <a:bodyPr rtlCol="0" anchor="ctr"/>
+          <a:lstStyle/>
+          <a:p>
+            <a:pPr algn="ctr"/>
+          </a:p>
+        </p:txBody>
+      </p:sp>
+      <p:sp>
+        <p:nvSpPr>
+          <p:cNvPr id="41" name="Rectangle 40"/>
+          <p:cNvSpPr/>
+          <p:nvPr/>
+        </p:nvSpPr>
+        <p:spPr>
+          <a:xfrm>
+            <a:off x="5403190" y="3332988"/>
+            <a:ext cx="1385316" cy="283464"/>
+          </a:xfrm>
+          <a:prstGeom prst="rect">
+            <a:avLst/>
+          </a:prstGeom>
+          <a:solidFill>
+            <a:srgbClr val="373D47"/>
+          </a:solidFill>
+          <a:ln>
+            <a:noFill/>
+          </a:ln>
+          <a:effectLst/>
+        </p:spPr>
+        <p:style>
+          <a:lnRef idx="1">
+            <a:schemeClr val="accent1"/>
+          </a:lnRef>
+          <a:fillRef idx="3">
+            <a:schemeClr val="accent1"/>
+          </a:fillRef>
+          <a:effectRef idx="2">
+            <a:schemeClr val="accent1"/>
+          </a:effectRef>
+          <a:fontRef idx="minor">
+            <a:schemeClr val="lt1"/>
+          </a:fontRef>
+        </p:style>
+        <p:txBody>
+          <a:bodyPr rtlCol="0" anchor="ctr"/>
+          <a:lstStyle/>
+          <a:p>
+            <a:pPr algn="ctr"/>
+          </a:p>
+        </p:txBody>
+      </p:sp>
+      <p:sp>
+        <p:nvSpPr>
+          <p:cNvPr id="42" name="TextBox 41"/>
+          <p:cNvSpPr txBox="1"/>
+          <p:nvPr/>
+        </p:nvSpPr>
+        <p:spPr>
+          <a:xfrm>
+            <a:off x="5403190" y="3332988"/>
+            <a:ext cx="1385316" cy="283464"/>
+          </a:xfrm>
+          <a:prstGeom prst="rect">
+            <a:avLst/>
+          </a:prstGeom>
+          <a:noFill/>
+        </p:spPr>
+        <p:txBody>
+          <a:bodyPr wrap="square" anchor="ctr" lIns="0" rIns="0" tIns="0" bIns="0">
+            <a:spAutoFit/>
+          </a:bodyPr>
+          <a:lstStyle/>
+          <a:p>
+            <a:pPr algn="ctr">
+              <a:lnSpc>
+                <a:spcPct val="100000"/>
+              </a:lnSpc>
+            </a:pPr>
+            <a:r>
+              <a:rPr sz="1250" b="1">
+                <a:solidFill>
+                  <a:srgbClr val="FFFFFF"/>
+                </a:solidFill>
+                <a:latin typeface="Paperlogy 7 Bold"/>
+                <a:ea typeface="Paperlogy 7 Bold"/>
+                <a:cs typeface="Paperlogy 7 Bold"/>
+              </a:rPr>
+              <a:t>교면 전용 재선별</a:t>
+            </a:r>
+          </a:p>
+        </p:txBody>
+      </p:sp>
+      <p:pic>
+        <p:nvPicPr>
+          <p:cNvPr id="43" name="Picture 42" descr="교면전용.png"/>
+          <p:cNvPicPr>
+            <a:picLocks noChangeAspect="1"/>
+          </p:cNvPicPr>
+          <p:nvPr/>
+        </p:nvPicPr>
+        <p:blipFill>
+          <a:blip r:embed="rId3"/>
+          <a:stretch>
+            <a:fillRect/>
+          </a:stretch>
+        </p:blipFill>
+        <p:spPr>
+          <a:xfrm>
+            <a:off x="2355120" y="3867912"/>
+            <a:ext cx="7481455" cy="2194560"/>
+          </a:xfrm>
+          <a:prstGeom prst="rect">
+            <a:avLst/>
+          </a:prstGeom>
+        </p:spPr>
+      </p:pic>
+      <p:sp>
+        <p:nvSpPr>
+          <p:cNvPr id="44" name="TextBox 43"/>
+          <p:cNvSpPr txBox="1"/>
+          <p:nvPr/>
+        </p:nvSpPr>
+        <p:spPr>
+          <a:xfrm>
+            <a:off x="411480" y="6291072"/>
+            <a:ext cx="11365992" cy="274320"/>
+          </a:xfrm>
+          <a:prstGeom prst="rect">
+            <a:avLst/>
+          </a:prstGeom>
+          <a:noFill/>
+        </p:spPr>
+        <p:txBody>
+          <a:bodyPr wrap="square" anchor="t" lIns="0" rIns="0" tIns="0" bIns="0">
+            <a:spAutoFit/>
+          </a:bodyPr>
+          <a:lstStyle/>
+          <a:p>
+            <a:pPr algn="l">
+              <a:lnSpc>
+                <a:spcPct val="100000"/>
+              </a:lnSpc>
+            </a:pPr>
+            <a:r>
+              <a:rPr sz="860" b="0">
+                <a:solidFill>
+                  <a:srgbClr val="6B7480"/>
+                </a:solidFill>
+                <a:latin typeface="Paperlogy 5 Medium"/>
+                <a:ea typeface="Paperlogy 5 Medium"/>
+                <a:cs typeface="Paperlogy 5 Medium"/>
+              </a:rPr>
+              <a:t>※ 처리(MT-InSAR)와 교면 전용 재선별은 서로 다른 단계라 점 수·속도가 다르다. 옛 ±30 m 선별로 만든 브리프 그림은 쓰지 않는다 — 그 점들은 지면보다 낮게 나와 교면이 아니었다.</a:t>
+            </a:r>
           </a:p>
         </p:txBody>
       </p:sp>

--- a/docs/KICT_Bmaps_Inframon_연구개발_7p_vF.pptx
+++ b/docs/KICT_Bmaps_Inframon_연구개발_7p_vF.pptx
@@ -533,6 +533,1064 @@
     </a:lvl9pPr>
   </p:notesStyle>
 </p:notesMaster>
+</file>
+
+<file path=ppt/notesSlides/notesSlide1.xml><?xml version="1.0" encoding="utf-8"?>
+<p:notes xmlns:a="http://schemas.openxmlformats.org/drawingml/2006/main" xmlns:p="http://schemas.openxmlformats.org/presentationml/2006/main" xmlns:r="http://schemas.openxmlformats.org/officeDocument/2006/relationships">
+  <p:cSld>
+    <p:spTree>
+      <p:nvGrpSpPr>
+        <p:cNvPr id="1" name=""/>
+        <p:cNvGrpSpPr/>
+        <p:nvPr/>
+      </p:nvGrpSpPr>
+      <p:grpSpPr>
+        <a:xfrm>
+          <a:off x="0" y="0"/>
+          <a:ext cx="0" cy="0"/>
+          <a:chOff x="0" y="0"/>
+          <a:chExt cx="0" cy="0"/>
+        </a:xfrm>
+      </p:grpSpPr>
+      <p:sp>
+        <p:nvSpPr>
+          <p:cNvPr id="2" name="Slide Image Placeholder 1"/>
+          <p:cNvSpPr>
+            <a:spLocks noGrp="1"/>
+          </p:cNvSpPr>
+          <p:nvPr>
+            <p:ph type="sldImg" idx="2"/>
+          </p:nvPr>
+        </p:nvSpPr>
+        <p:spPr/>
+      </p:sp>
+      <p:sp>
+        <p:nvSpPr>
+          <p:cNvPr id="3" name="Notes Placeholder 2"/>
+          <p:cNvSpPr>
+            <a:spLocks noGrp="1"/>
+          </p:cNvSpPr>
+          <p:nvPr>
+            <p:ph type="body" idx="3" sz="quarter"/>
+          </p:nvPr>
+        </p:nvSpPr>
+        <p:spPr/>
+        <p:txBody>
+          <a:bodyPr/>
+          <a:lstStyle/>
+          <a:p>
+            <a:r>
+              <a:t>[여는 말]</a:t>
+            </a:r>
+          </a:p>
+          <a:p>
+            <a:r>
+              <a:t>안녕하십니까. 오늘 말씀드릴 것은 위성으로 교량 변위를 재는 플랫폼, Inframon 입니다.</a:t>
+            </a:r>
+          </a:p>
+          <a:p/>
+          <a:p>
+            <a:r>
+              <a:t>한 줄로 말씀드리면 — 계측기가 달리지 않은 교량도 움직임을 재서, KICT B-Maps 에</a:t>
+            </a:r>
+          </a:p>
+          <a:p>
+            <a:r>
+              <a:t>얹자는 이야기입니다.</a:t>
+            </a:r>
+          </a:p>
+          <a:p/>
+          <a:p>
+            <a:r>
+              <a:t>순서는 네 장입니다. 왜 필요한가, 무엇을 목표로 하는가, 지금 무엇을 만들었는가,</a:t>
+            </a:r>
+          </a:p>
+          <a:p>
+            <a:r>
+              <a:t>그리고 앞으로 어떻게 할 것인가.</a:t>
+            </a:r>
+          </a:p>
+          <a:p/>
+          <a:p>
+            <a:r>
+              <a:t>먼저 왜 필요한지부터 말씀드리겠습니다.</a:t>
+            </a:r>
+          </a:p>
+        </p:txBody>
+      </p:sp>
+      <p:sp>
+        <p:nvSpPr>
+          <p:cNvPr id="4" name="Slide Number Placeholder 3"/>
+          <p:cNvSpPr>
+            <a:spLocks noGrp="1"/>
+          </p:cNvSpPr>
+          <p:nvPr>
+            <p:ph type="sldNum" idx="5" sz="quarter"/>
+          </p:nvPr>
+        </p:nvSpPr>
+        <p:spPr/>
+      </p:sp>
+    </p:spTree>
+  </p:cSld>
+  <p:clrMapOvr>
+    <a:masterClrMapping/>
+  </p:clrMapOvr>
+</p:notes>
+</file>
+
+<file path=ppt/notesSlides/notesSlide2.xml><?xml version="1.0" encoding="utf-8"?>
+<p:notes xmlns:a="http://schemas.openxmlformats.org/drawingml/2006/main" xmlns:p="http://schemas.openxmlformats.org/presentationml/2006/main" xmlns:r="http://schemas.openxmlformats.org/officeDocument/2006/relationships">
+  <p:cSld>
+    <p:spTree>
+      <p:nvGrpSpPr>
+        <p:cNvPr id="1" name=""/>
+        <p:cNvGrpSpPr/>
+        <p:nvPr/>
+      </p:nvGrpSpPr>
+      <p:grpSpPr>
+        <a:xfrm>
+          <a:off x="0" y="0"/>
+          <a:ext cx="0" cy="0"/>
+          <a:chOff x="0" y="0"/>
+          <a:chExt cx="0" cy="0"/>
+        </a:xfrm>
+      </p:grpSpPr>
+      <p:sp>
+        <p:nvSpPr>
+          <p:cNvPr id="2" name="Slide Image Placeholder 1"/>
+          <p:cNvSpPr>
+            <a:spLocks noGrp="1"/>
+          </p:cNvSpPr>
+          <p:nvPr>
+            <p:ph type="sldImg" idx="2"/>
+          </p:nvPr>
+        </p:nvSpPr>
+        <p:spPr/>
+      </p:sp>
+      <p:sp>
+        <p:nvSpPr>
+          <p:cNvPr id="3" name="Notes Placeholder 2"/>
+          <p:cNvSpPr>
+            <a:spLocks noGrp="1"/>
+          </p:cNvSpPr>
+          <p:nvPr>
+            <p:ph type="body" idx="3" sz="quarter"/>
+          </p:nvPr>
+        </p:nvSpPr>
+        <p:spPr/>
+        <p:txBody>
+          <a:bodyPr/>
+          <a:lstStyle/>
+          <a:p>
+            <a:r>
+              <a:t>[문제를 세우는 장]</a:t>
+            </a:r>
+          </a:p>
+          <a:p>
+            <a:r>
+              <a:t>지금 우리는 다리의 일부만, 그것도 가끔만 보고 있습니다.</a:t>
+            </a:r>
+          </a:p>
+          <a:p/>
+          <a:p>
+            <a:r>
+              <a:t>센서는 일부 교량의 일부 지점에만 붙어 있습니다. 성수대교와 한강대교조차 처짐</a:t>
+            </a:r>
+          </a:p>
+          <a:p>
+            <a:r>
+              <a:t>센서가 없습니다. 센서가 없는 다리는 점검과 점검 사이가 통째로 빈칸이고,</a:t>
+            </a:r>
+          </a:p>
+          <a:p>
+            <a:r>
+              <a:t>지나간 시간은 되돌려 볼 수 없습니다.</a:t>
+            </a:r>
+          </a:p>
+          <a:p/>
+          <a:p>
+            <a:r>
+              <a:t>위성은 그 빈칸을 채웁니다. 같은 자리를 12일마다 다시 찍고, 다리에는 아무것도</a:t>
+            </a:r>
+          </a:p>
+          <a:p>
+            <a:r>
+              <a:t>달지 않으며, 자료는 전량 무상입니다.</a:t>
+            </a:r>
+          </a:p>
+          <a:p/>
+          <a:p>
+            <a:r>
+              <a:t>★ 여기서 꼭 말할 것 — 2018년 6월까지 거슬러 올라가 다시 볼 수 있다는 점입니다.</a:t>
+            </a:r>
+          </a:p>
+          <a:p>
+            <a:r>
+              <a:t>센서는 단 뒤부터만 보이지만, 위성은 이미 찍어 둔 것이 있습니다. 이게 가장 큰</a:t>
+            </a:r>
+          </a:p>
+          <a:p>
+            <a:r>
+              <a:t>차이입니다.</a:t>
+            </a:r>
+          </a:p>
+          <a:p/>
+          <a:p>
+            <a:r>
+              <a:t>아래 표가 그 차이를 정리한 것입니다. 계측기가 있는 교량은 교차검증이 되고,</a:t>
+            </a:r>
+          </a:p>
+          <a:p>
+            <a:r>
+              <a:t>없는 교량은 12일마다 전 구간이 갱신됩니다.</a:t>
+            </a:r>
+          </a:p>
+        </p:txBody>
+      </p:sp>
+      <p:sp>
+        <p:nvSpPr>
+          <p:cNvPr id="4" name="Slide Number Placeholder 3"/>
+          <p:cNvSpPr>
+            <a:spLocks noGrp="1"/>
+          </p:cNvSpPr>
+          <p:nvPr>
+            <p:ph type="sldNum" idx="5" sz="quarter"/>
+          </p:nvPr>
+        </p:nvSpPr>
+        <p:spPr/>
+      </p:sp>
+    </p:spTree>
+  </p:cSld>
+  <p:clrMapOvr>
+    <a:masterClrMapping/>
+  </p:clrMapOvr>
+</p:notes>
+</file>
+
+<file path=ppt/notesSlides/notesSlide3.xml><?xml version="1.0" encoding="utf-8"?>
+<p:notes xmlns:a="http://schemas.openxmlformats.org/drawingml/2006/main" xmlns:p="http://schemas.openxmlformats.org/presentationml/2006/main" xmlns:r="http://schemas.openxmlformats.org/officeDocument/2006/relationships">
+  <p:cSld>
+    <p:spTree>
+      <p:nvGrpSpPr>
+        <p:cNvPr id="1" name=""/>
+        <p:cNvGrpSpPr/>
+        <p:nvPr/>
+      </p:nvGrpSpPr>
+      <p:grpSpPr>
+        <a:xfrm>
+          <a:off x="0" y="0"/>
+          <a:ext cx="0" cy="0"/>
+          <a:chOff x="0" y="0"/>
+          <a:chExt cx="0" cy="0"/>
+        </a:xfrm>
+      </p:grpSpPr>
+      <p:sp>
+        <p:nvSpPr>
+          <p:cNvPr id="2" name="Slide Image Placeholder 1"/>
+          <p:cNvSpPr>
+            <a:spLocks noGrp="1"/>
+          </p:cNvSpPr>
+          <p:nvPr>
+            <p:ph type="sldImg" idx="2"/>
+          </p:nvPr>
+        </p:nvSpPr>
+        <p:spPr/>
+      </p:sp>
+      <p:sp>
+        <p:nvSpPr>
+          <p:cNvPr id="3" name="Notes Placeholder 2"/>
+          <p:cNvSpPr>
+            <a:spLocks noGrp="1"/>
+          </p:cNvSpPr>
+          <p:nvPr>
+            <p:ph type="body" idx="3" sz="quarter"/>
+          </p:nvPr>
+        </p:nvSpPr>
+        <p:spPr/>
+        <p:txBody>
+          <a:bodyPr/>
+          <a:lstStyle/>
+          <a:p>
+            <a:r>
+              <a:t>[목표를 말하는 장]</a:t>
+            </a:r>
+          </a:p>
+          <a:p>
+            <a:r>
+              <a:t>최종 목표는 계측기가 없는 교량까지 위성으로 상태를 파악하는 체계를 만들고,</a:t>
+            </a:r>
+          </a:p>
+          <a:p>
+            <a:r>
+              <a:t>그것을 B-Maps 에 연계하는 것입니다.</a:t>
+            </a:r>
+          </a:p>
+          <a:p/>
+          <a:p>
+            <a:r>
+              <a:t>세부 목표는 넷입니다 — 위성 변위 자동 산출, 물리 기반 AI 해석, 교량 디지털 트윈,</a:t>
+            </a:r>
+          </a:p>
+          <a:p>
+            <a:r>
+              <a:t>그리고 B-Maps 연계 서비스.</a:t>
+            </a:r>
+          </a:p>
+          <a:p/>
+          <a:p>
+            <a:r>
+              <a:t>★ 표 가운데 칸을 봐 주십시오. '현재 달성' 이 아니라 **'지금 단계'** 라고 적었습니다.</a:t>
+            </a:r>
+          </a:p>
+          <a:p>
+            <a:r>
+              <a:t>개소 수나 비율을 적지 않았습니다. 아직 정확도를 말씀드릴 단계가 아니기 때문입니다.</a:t>
+            </a:r>
+          </a:p>
+          <a:p>
+            <a:r>
+              <a:t>정확도 지표는 계측 대조와 측점 밀도를 확보한 뒤에 내겠습니다.</a:t>
+            </a:r>
+          </a:p>
+          <a:p/>
+          <a:p>
+            <a:r>
+              <a:t>CRI 도 '기준 잠정' 이라고 적어 두었습니다. 안전등급이 양호한 교량의 실측값으로</a:t>
+            </a:r>
+          </a:p>
+          <a:p>
+            <a:r>
+              <a:t>기준을 다시 잡아야 확정됩니다. 지금 등급을 구조 상태로 읽으시면 안 됩니다.</a:t>
+            </a:r>
+          </a:p>
+        </p:txBody>
+      </p:sp>
+      <p:sp>
+        <p:nvSpPr>
+          <p:cNvPr id="4" name="Slide Number Placeholder 3"/>
+          <p:cNvSpPr>
+            <a:spLocks noGrp="1"/>
+          </p:cNvSpPr>
+          <p:nvPr>
+            <p:ph type="sldNum" idx="5" sz="quarter"/>
+          </p:nvPr>
+        </p:nvSpPr>
+        <p:spPr/>
+      </p:sp>
+    </p:spTree>
+  </p:cSld>
+  <p:clrMapOvr>
+    <a:masterClrMapping/>
+  </p:clrMapOvr>
+</p:notes>
+</file>
+
+<file path=ppt/notesSlides/notesSlide4.xml><?xml version="1.0" encoding="utf-8"?>
+<p:notes xmlns:a="http://schemas.openxmlformats.org/drawingml/2006/main" xmlns:p="http://schemas.openxmlformats.org/presentationml/2006/main" xmlns:r="http://schemas.openxmlformats.org/officeDocument/2006/relationships">
+  <p:cSld>
+    <p:spTree>
+      <p:nvGrpSpPr>
+        <p:cNvPr id="1" name=""/>
+        <p:cNvGrpSpPr/>
+        <p:nvPr/>
+      </p:nvGrpSpPr>
+      <p:grpSpPr>
+        <a:xfrm>
+          <a:off x="0" y="0"/>
+          <a:ext cx="0" cy="0"/>
+          <a:chOff x="0" y="0"/>
+          <a:chExt cx="0" cy="0"/>
+        </a:xfrm>
+      </p:grpSpPr>
+      <p:sp>
+        <p:nvSpPr>
+          <p:cNvPr id="2" name="Slide Image Placeholder 1"/>
+          <p:cNvSpPr>
+            <a:spLocks noGrp="1"/>
+          </p:cNvSpPr>
+          <p:nvPr>
+            <p:ph type="sldImg" idx="2"/>
+          </p:nvPr>
+        </p:nvSpPr>
+        <p:spPr/>
+      </p:sp>
+      <p:sp>
+        <p:nvSpPr>
+          <p:cNvPr id="3" name="Notes Placeholder 2"/>
+          <p:cNvSpPr>
+            <a:spLocks noGrp="1"/>
+          </p:cNvSpPr>
+          <p:nvPr>
+            <p:ph type="body" idx="3" sz="quarter"/>
+          </p:nvPr>
+        </p:nvSpPr>
+        <p:spPr/>
+        <p:txBody>
+          <a:bodyPr/>
+          <a:lstStyle/>
+          <a:p>
+            <a:r>
+              <a:t>[무엇을 만들었는지 — 그리고 못 하는 것]</a:t>
+            </a:r>
+          </a:p>
+          <a:p>
+            <a:r>
+              <a:t>좌표 하나만 넣으면 여섯 단계가 사람 손 없이 돕니다. 영상 고르기, InSAR 처리,</a:t>
+            </a:r>
+          </a:p>
+          <a:p>
+            <a:r>
+              <a:t>교면 측점 정합, PINN 역산, 위험도 평가, 그리고 산출·연동입니다.</a:t>
+            </a:r>
+          </a:p>
+          <a:p/>
+          <a:p>
+            <a:r>
+              <a:t>왼쪽 특징 가운데 '근거 기록' 을 봐 주십시오. 관측 조건과 신뢰구간을 결과에 **항상</a:t>
+            </a:r>
+          </a:p>
+          <a:p>
+            <a:r>
+              <a:t>함께** 남깁니다. 값만 던지면 받는 쪽이 그걸 믿어도 되는지 알 수 없기 때문입니다.</a:t>
+            </a:r>
+          </a:p>
+          <a:p/>
+          <a:p>
+            <a:r>
+              <a:t>★ 오른쪽은 **저희가 못 하는 것**입니다. 이 자리에서 먼저 말씀드리는 게 맞다고</a:t>
+            </a:r>
+          </a:p>
+          <a:p>
+            <a:r>
+              <a:t>봤습니다.</a:t>
+            </a:r>
+          </a:p>
+          <a:p/>
+          <a:p>
+            <a:r>
+              <a:t> · 교면 측점 밀도 — 위성 화소가 지상 5×20 m 인데 상판 폭은 1~2 화소입니다.</a:t>
+            </a:r>
+          </a:p>
+          <a:p>
+            <a:r>
+              <a:t>   프로그램으로 늘릴 수 없습니다. 고해상도 위성이나 코너리플렉터가 답입니다.</a:t>
+            </a:r>
+          </a:p>
+          <a:p>
+            <a:r>
+              <a:t> · 절대 강성 EI — 위성은 상대 변위만 보므로 관측으로 낼 수 없습니다.</a:t>
+            </a:r>
+          </a:p>
+          <a:p>
+            <a:r>
+              <a:t>   지금 값은 설계 제원으로 계산한 것입니다.</a:t>
+            </a:r>
+          </a:p>
+          <a:p>
+            <a:r>
+              <a:t> · 연직 변위 — 한 궤도로는 위성 시선 방향만 나옵니다. 두 궤도를 합쳐야</a:t>
+            </a:r>
+          </a:p>
+          <a:p>
+            <a:r>
+              <a:t>   위아래가 됩니다.</a:t>
+            </a:r>
+          </a:p>
+        </p:txBody>
+      </p:sp>
+      <p:sp>
+        <p:nvSpPr>
+          <p:cNvPr id="4" name="Slide Number Placeholder 3"/>
+          <p:cNvSpPr>
+            <a:spLocks noGrp="1"/>
+          </p:cNvSpPr>
+          <p:nvPr>
+            <p:ph type="sldNum" idx="5" sz="quarter"/>
+          </p:nvPr>
+        </p:nvSpPr>
+        <p:spPr/>
+      </p:sp>
+    </p:spTree>
+  </p:cSld>
+  <p:clrMapOvr>
+    <a:masterClrMapping/>
+  </p:clrMapOvr>
+</p:notes>
+</file>
+
+<file path=ppt/notesSlides/notesSlide5.xml><?xml version="1.0" encoding="utf-8"?>
+<p:notes xmlns:a="http://schemas.openxmlformats.org/drawingml/2006/main" xmlns:p="http://schemas.openxmlformats.org/presentationml/2006/main" xmlns:r="http://schemas.openxmlformats.org/officeDocument/2006/relationships">
+  <p:cSld>
+    <p:spTree>
+      <p:nvGrpSpPr>
+        <p:cNvPr id="1" name=""/>
+        <p:cNvGrpSpPr/>
+        <p:nvPr/>
+      </p:nvGrpSpPr>
+      <p:grpSpPr>
+        <a:xfrm>
+          <a:off x="0" y="0"/>
+          <a:ext cx="0" cy="0"/>
+          <a:chOff x="0" y="0"/>
+          <a:chExt cx="0" cy="0"/>
+        </a:xfrm>
+      </p:grpSpPr>
+      <p:sp>
+        <p:nvSpPr>
+          <p:cNvPr id="2" name="Slide Image Placeholder 1"/>
+          <p:cNvSpPr>
+            <a:spLocks noGrp="1"/>
+          </p:cNvSpPr>
+          <p:nvPr>
+            <p:ph type="sldImg" idx="2"/>
+          </p:nvPr>
+        </p:nvSpPr>
+        <p:spPr/>
+      </p:sp>
+      <p:sp>
+        <p:nvSpPr>
+          <p:cNvPr id="3" name="Notes Placeholder 2"/>
+          <p:cNvSpPr>
+            <a:spLocks noGrp="1"/>
+          </p:cNvSpPr>
+          <p:nvPr>
+            <p:ph type="body" idx="3" sz="quarter"/>
+          </p:nvPr>
+        </p:nvSpPr>
+        <p:spPr/>
+        <p:txBody>
+          <a:bodyPr/>
+          <a:lstStyle/>
+          <a:p>
+            <a:r>
+              <a:t>[실증 — 교량마다 같은 것이 나온다]</a:t>
+            </a:r>
+          </a:p>
+          <a:p>
+            <a:r>
+              <a:t>교량마다 같은 산출물과 IFC 트윈이 자동으로 나옵니다. 표는 한강 교량들이고,</a:t>
+            </a:r>
+          </a:p>
+          <a:p>
+            <a:r>
+              <a:t>관측 시점 수와 교면 측점 수가 교량마다 다릅니다.</a:t>
+            </a:r>
+          </a:p>
+          <a:p/>
+          <a:p>
+            <a:r>
+              <a:t>★ 여기서 **변위속도를 일부러 빼 두었습니다.** 지금 측점으로 낸 속도는 대부분</a:t>
+            </a:r>
+          </a:p>
+          <a:p>
+            <a:r>
+              <a:t>95 % 구간이 0 을 품습니다. 숫자를 적어 두면 확정된 관측처럼 읽히기 때문에,</a:t>
+            </a:r>
+          </a:p>
+          <a:p>
+            <a:r>
+              <a:t>측점 밀도를 확보한 뒤에 제시하겠습니다. 물어보시면 그대로 말씀드리면 됩니다.</a:t>
+            </a:r>
+          </a:p>
+          <a:p/>
+          <a:p>
+            <a:r>
+              <a:t>아래는 교량 한 곳당 자동으로 나오는 여섯 가지입니다. 오른쪽 그림이 그중 IFC</a:t>
+            </a:r>
+          </a:p>
+          <a:p>
+            <a:r>
+              <a:t>트윈이고, 점 색이 위성 시선 방향의 변위 속도입니다.</a:t>
+            </a:r>
+          </a:p>
+          <a:p/>
+          <a:p>
+            <a:r>
+              <a:t>※ "3D 인데 높이는 정확한가" 물으시면 —</a:t>
+            </a:r>
+          </a:p>
+          <a:p>
+            <a:r>
+              <a:t>높이는 DEM 에 위성이 추정한 잔차고도를 더한 값이고, 그 불확실도가 교량마다</a:t>
+            </a:r>
+          </a:p>
+          <a:p>
+            <a:r>
+              <a:t>7~22 m 입니다. 주탑처럼 30 m 이상 차이 나는 것은 가르지만, 교각·교대는 못</a:t>
+            </a:r>
+          </a:p>
+          <a:p>
+            <a:r>
+              <a:t>가립니다. 그래서 교면은 평면 위치로 고르고, 높이는 검산으로만 씁니다.</a:t>
+            </a:r>
+          </a:p>
+          <a:p>
+            <a:r>
+              <a:t>실제로 그 검산이 일한 적이 있습니다 — 한 교량에서 '교면 위' 점들이 지면보다</a:t>
+            </a:r>
+          </a:p>
+          <a:p>
+            <a:r>
+              <a:t>44 m 낮게 나와, 그게 교면이 아니라 강변 지반임을 잡아냈습니다.</a:t>
+            </a:r>
+          </a:p>
+        </p:txBody>
+      </p:sp>
+      <p:sp>
+        <p:nvSpPr>
+          <p:cNvPr id="4" name="Slide Number Placeholder 3"/>
+          <p:cNvSpPr>
+            <a:spLocks noGrp="1"/>
+          </p:cNvSpPr>
+          <p:nvPr>
+            <p:ph type="sldNum" idx="5" sz="quarter"/>
+          </p:nvPr>
+        </p:nvSpPr>
+        <p:spPr/>
+      </p:sp>
+    </p:spTree>
+  </p:cSld>
+  <p:clrMapOvr>
+    <a:masterClrMapping/>
+  </p:clrMapOvr>
+</p:notes>
+</file>
+
+<file path=ppt/notesSlides/notesSlide6.xml><?xml version="1.0" encoding="utf-8"?>
+<p:notes xmlns:a="http://schemas.openxmlformats.org/drawingml/2006/main" xmlns:p="http://schemas.openxmlformats.org/presentationml/2006/main" xmlns:r="http://schemas.openxmlformats.org/officeDocument/2006/relationships">
+  <p:cSld>
+    <p:spTree>
+      <p:nvGrpSpPr>
+        <p:cNvPr id="1" name=""/>
+        <p:cNvGrpSpPr/>
+        <p:nvPr/>
+      </p:nvGrpSpPr>
+      <p:grpSpPr>
+        <a:xfrm>
+          <a:off x="0" y="0"/>
+          <a:ext cx="0" cy="0"/>
+          <a:chOff x="0" y="0"/>
+          <a:chExt cx="0" cy="0"/>
+        </a:xfrm>
+      </p:grpSpPr>
+      <p:sp>
+        <p:nvSpPr>
+          <p:cNvPr id="2" name="Slide Image Placeholder 1"/>
+          <p:cNvSpPr>
+            <a:spLocks noGrp="1"/>
+          </p:cNvSpPr>
+          <p:nvPr>
+            <p:ph type="sldImg" idx="2"/>
+          </p:nvPr>
+        </p:nvSpPr>
+        <p:spPr/>
+      </p:sp>
+      <p:sp>
+        <p:nvSpPr>
+          <p:cNvPr id="3" name="Notes Placeholder 2"/>
+          <p:cNvSpPr>
+            <a:spLocks noGrp="1"/>
+          </p:cNvSpPr>
+          <p:nvPr>
+            <p:ph type="body" idx="3" sz="quarter"/>
+          </p:nvPr>
+        </p:nvSpPr>
+        <p:spPr/>
+        <p:txBody>
+          <a:bodyPr/>
+          <a:lstStyle/>
+          <a:p>
+            <a:r>
+              <a:t>[실제로 돈다 — 그리고 어떻게 붙는가]</a:t>
+            </a:r>
+          </a:p>
+          <a:p>
+            <a:r>
+              <a:t>이건 개념도가 아니라 **실제로 도는 화면**입니다. 성수대교, 관측 101회, 교면 측점</a:t>
+            </a:r>
+          </a:p>
+          <a:p>
+            <a:r>
+              <a:t>103개. 지도에서 점을 하나 누르면 그 자리의 변위 이력이 오른쪽에 뜨고, 아래는</a:t>
+            </a:r>
+          </a:p>
+          <a:p>
+            <a:r>
+              <a:t>위험 지수 추세입니다. CSV 로 바로 내려받습니다.</a:t>
+            </a:r>
+          </a:p>
+          <a:p/>
+          <a:p>
+            <a:r>
+              <a:t>★ 붙이는 방식이 중요합니다. **B-Maps 본체는 한 줄도 고치지 않습니다.**</a:t>
+            </a:r>
+          </a:p>
+          <a:p>
+            <a:r>
+              <a:t>옆에 붙는 조회 전용 프로그램이 교량관리번호로 물어보면 답하는 구조입니다.</a:t>
+            </a:r>
+          </a:p>
+          <a:p/>
+          <a:p>
+            <a:r>
+              <a:t>그래서 세 가지가 됩니다.</a:t>
+            </a:r>
+          </a:p>
+          <a:p>
+            <a:r>
+              <a:t> · B-Maps 개발팀이 손댈 것이 없습니다.</a:t>
+            </a:r>
+          </a:p>
+          <a:p>
+            <a:r>
+              <a:t> · 저희 쪽이 멈춰도 B-Maps 는 멀쩡합니다. 위성 탭만 비고 나머지는 그대로입니다.</a:t>
+            </a:r>
+          </a:p>
+          <a:p>
+            <a:r>
+              <a:t> · 마음에 안 드시면 그냥 끄시면 됩니다. 저희는 읽기만 하고 쓰지 않습니다.</a:t>
+            </a:r>
+          </a:p>
+          <a:p/>
+          <a:p>
+            <a:r>
+              <a:t>오른쪽 위는 측점마다 나오는 값 네 가지와 대기 보정입니다.</a:t>
+            </a:r>
+          </a:p>
+          <a:p/>
+          <a:p>
+            <a:r>
+              <a:t>그 아래 '한계' 를 한 번 더 말씀드립니다 — 부족한 것은 방법이 아니라 **교면 측점의</a:t>
+            </a:r>
+          </a:p>
+          <a:p>
+            <a:r>
+              <a:t>수**입니다. 주경간에 코너리플렉터를 놓거나 고해상도 위성을 쓰면 채워집니다.</a:t>
+            </a:r>
+          </a:p>
+        </p:txBody>
+      </p:sp>
+      <p:sp>
+        <p:nvSpPr>
+          <p:cNvPr id="4" name="Slide Number Placeholder 3"/>
+          <p:cNvSpPr>
+            <a:spLocks noGrp="1"/>
+          </p:cNvSpPr>
+          <p:nvPr>
+            <p:ph type="sldNum" idx="5" sz="quarter"/>
+          </p:nvPr>
+        </p:nvSpPr>
+        <p:spPr/>
+      </p:sp>
+    </p:spTree>
+  </p:cSld>
+  <p:clrMapOvr>
+    <a:masterClrMapping/>
+  </p:clrMapOvr>
+</p:notes>
+</file>
+
+<file path=ppt/notesSlides/notesSlide7.xml><?xml version="1.0" encoding="utf-8"?>
+<p:notes xmlns:a="http://schemas.openxmlformats.org/drawingml/2006/main" xmlns:p="http://schemas.openxmlformats.org/presentationml/2006/main" xmlns:r="http://schemas.openxmlformats.org/officeDocument/2006/relationships">
+  <p:cSld>
+    <p:spTree>
+      <p:nvGrpSpPr>
+        <p:cNvPr id="1" name=""/>
+        <p:cNvGrpSpPr/>
+        <p:nvPr/>
+      </p:nvGrpSpPr>
+      <p:grpSpPr>
+        <a:xfrm>
+          <a:off x="0" y="0"/>
+          <a:ext cx="0" cy="0"/>
+          <a:chOff x="0" y="0"/>
+          <a:chExt cx="0" cy="0"/>
+        </a:xfrm>
+      </p:grpSpPr>
+      <p:sp>
+        <p:nvSpPr>
+          <p:cNvPr id="2" name="Slide Image Placeholder 1"/>
+          <p:cNvSpPr>
+            <a:spLocks noGrp="1"/>
+          </p:cNvSpPr>
+          <p:nvPr>
+            <p:ph type="sldImg" idx="2"/>
+          </p:nvPr>
+        </p:nvSpPr>
+        <p:spPr/>
+      </p:sp>
+      <p:sp>
+        <p:nvSpPr>
+          <p:cNvPr id="3" name="Notes Placeholder 2"/>
+          <p:cNvSpPr>
+            <a:spLocks noGrp="1"/>
+          </p:cNvSpPr>
+          <p:nvPr>
+            <p:ph type="body" idx="3" sz="quarter"/>
+          </p:nvPr>
+        </p:nvSpPr>
+        <p:spPr/>
+        <p:txBody>
+          <a:bodyPr/>
+          <a:lstStyle/>
+          <a:p>
+            <a:r>
+              <a:t>[앞으로 — 그리고 부탁]</a:t>
+            </a:r>
+          </a:p>
+          <a:p>
+            <a:r>
+              <a:t>개발·실증은 진행했고, 시범 연동은 협의가 필요하며, 운영·고도화가 남았습니다.</a:t>
+            </a:r>
+          </a:p>
+          <a:p/>
+          <a:p>
+            <a:r>
+              <a:t>운영 단계에서 PINN 이 본격적으로 일합니다 — 성능 평가, 노후도 추정, 앞으로의</a:t>
+            </a:r>
+          </a:p>
+          <a:p>
+            <a:r>
+              <a:t>거동 예측입니다. 지금은 변위를 열·하중·침하·이상으로 나누는 데까지 와 있고,</a:t>
+            </a:r>
+          </a:p>
+          <a:p>
+            <a:r>
+              <a:t>그 나눔이 맞는지 계측으로 검증하는 것이 다음 일입니다.</a:t>
+            </a:r>
+          </a:p>
+          <a:p/>
+          <a:p>
+            <a:r>
+              <a:t>★ KICT 께 드리는 요청은 **자료 네 가지뿐**입니다. 새로 만들어 주실 것은 없고,</a:t>
+            </a:r>
+          </a:p>
+          <a:p>
+            <a:r>
+              <a:t>B-Maps 가 이미 들고 계신 것들입니다.</a:t>
+            </a:r>
+          </a:p>
+          <a:p/>
+          <a:p>
+            <a:r>
+              <a:t> 1 교량 대장 제원 — 연장·폭·경간·형하고. 지금 저희는 공개데이터와 지도로</a:t>
+            </a:r>
+          </a:p>
+          <a:p>
+            <a:r>
+              <a:t>   추정합니다. 교면 측점을 가려내는 폭이 이 값에서 나오므로, 제원이 정확해지면</a:t>
+            </a:r>
+          </a:p>
+          <a:p>
+            <a:r>
+              <a:t>   저희 결과가 **바로** 좋아집니다. 넷 중 이게 제일 급합니다.</a:t>
+            </a:r>
+          </a:p>
+          <a:p>
+            <a:r>
+              <a:t> 2 교량관리번호와 대장 좌표 — 결과를 대장에 붙이는 열쇠입니다.</a:t>
+            </a:r>
+          </a:p>
+          <a:p>
+            <a:r>
+              <a:t> 3 보유하신 IFC 모델 — 있는 교량만이라도. 그러면 저희 트윈이 아니라 B-Maps 의</a:t>
+            </a:r>
+          </a:p>
+          <a:p>
+            <a:r>
+              <a:t>   부재에 값이 바로 붙습니다.</a:t>
+            </a:r>
+          </a:p>
+          <a:p>
+            <a:r>
+              <a:t> 4 준공·보수 이력 — 연도와 일자만. 변위에 계단이 보일 때 보수인지 이상인지</a:t>
+            </a:r>
+          </a:p>
+          <a:p>
+            <a:r>
+              <a:t>   가릅니다.</a:t>
+            </a:r>
+          </a:p>
+          <a:p/>
+          <a:p>
+            <a:r>
+              <a:t>맨 아래 — **연동 시연은 지금 바로 가능합니다.** 레지스트리에 교량관리번호만</a:t>
+            </a:r>
+          </a:p>
+          <a:p>
+            <a:r>
+              <a:t>넣어 주시면 그 교량이 B-Maps 탭에 뜹니다.</a:t>
+            </a:r>
+          </a:p>
+        </p:txBody>
+      </p:sp>
+      <p:sp>
+        <p:nvSpPr>
+          <p:cNvPr id="4" name="Slide Number Placeholder 3"/>
+          <p:cNvSpPr>
+            <a:spLocks noGrp="1"/>
+          </p:cNvSpPr>
+          <p:nvPr>
+            <p:ph type="sldNum" idx="5" sz="quarter"/>
+          </p:nvPr>
+        </p:nvSpPr>
+        <p:spPr/>
+      </p:sp>
+    </p:spTree>
+  </p:cSld>
+  <p:clrMapOvr>
+    <a:masterClrMapping/>
+  </p:clrMapOvr>
+</p:notes>
+</file>
+
+<file path=ppt/notesSlides/notesSlide8.xml><?xml version="1.0" encoding="utf-8"?>
+<p:notes xmlns:a="http://schemas.openxmlformats.org/drawingml/2006/main" xmlns:p="http://schemas.openxmlformats.org/presentationml/2006/main" xmlns:r="http://schemas.openxmlformats.org/officeDocument/2006/relationships">
+  <p:cSld>
+    <p:spTree>
+      <p:nvGrpSpPr>
+        <p:cNvPr id="1" name=""/>
+        <p:cNvGrpSpPr/>
+        <p:nvPr/>
+      </p:nvGrpSpPr>
+      <p:grpSpPr>
+        <a:xfrm>
+          <a:off x="0" y="0"/>
+          <a:ext cx="0" cy="0"/>
+          <a:chOff x="0" y="0"/>
+          <a:chExt cx="0" cy="0"/>
+        </a:xfrm>
+      </p:grpSpPr>
+      <p:sp>
+        <p:nvSpPr>
+          <p:cNvPr id="2" name="Slide Image Placeholder 1"/>
+          <p:cNvSpPr>
+            <a:spLocks noGrp="1"/>
+          </p:cNvSpPr>
+          <p:nvPr>
+            <p:ph type="sldImg" idx="2"/>
+          </p:nvPr>
+        </p:nvSpPr>
+        <p:spPr/>
+      </p:sp>
+      <p:sp>
+        <p:nvSpPr>
+          <p:cNvPr id="3" name="Notes Placeholder 2"/>
+          <p:cNvSpPr>
+            <a:spLocks noGrp="1"/>
+          </p:cNvSpPr>
+          <p:nvPr>
+            <p:ph type="body" idx="3" sz="quarter"/>
+          </p:nvPr>
+        </p:nvSpPr>
+        <p:spPr/>
+        <p:txBody>
+          <a:bodyPr/>
+          <a:lstStyle/>
+          <a:p>
+            <a:r>
+              <a:t>[부록 — 물으시면 꺼내는 장]</a:t>
+            </a:r>
+          </a:p>
+          <a:p>
+            <a:r>
+              <a:t>성수대교 한 곳을 끝까지 펴 본 것입니다. 관측 101회, 교면 측점 15점.</a:t>
+            </a:r>
+          </a:p>
+          <a:p/>
+          <a:p>
+            <a:r>
+              <a:t>★ 가장 말씀드리고 싶은 것은 오른쪽 두 번째 줄입니다. **열팽창이 교면과 지반에서</a:t>
+            </a:r>
+          </a:p>
+          <a:p>
+            <a:r>
+              <a:t>갈라집니다** — 교면은 +0.15, 지반은 +0.41 mm/°C 입니다.</a:t>
+            </a:r>
+          </a:p>
+          <a:p>
+            <a:r>
+              <a:t>"교면을 보고 있는 게 맞느냐" 가 이 과제에서 가장 아픈 질문인데, 여기서는 그 답이</a:t>
+            </a:r>
+          </a:p>
+          <a:p>
+            <a:r>
+              <a:t>숫자로 나옵니다. 위성이 다리를 본 것이지 강변 땅을 본 것이 아니라는 뜻입니다.</a:t>
+            </a:r>
+          </a:p>
+          <a:p/>
+          <a:p>
+            <a:r>
+              <a:t>왼쪽은 처리 쪽입니다. 536점 가운데 시간결맞음 문턱을 넘은 204점을 썼고,</a:t>
+            </a:r>
+          </a:p>
+          <a:p>
+            <a:r>
+              <a:t>대기 보정으로 잔차가 16.3 에서 11.2 mm 로 줄었습니다.</a:t>
+            </a:r>
+          </a:p>
+          <a:p/>
+          <a:p>
+            <a:r>
+              <a:t>※ "두 칸의 점 수가 왜 다른가" 물으시면 —</a:t>
+            </a:r>
+          </a:p>
+          <a:p>
+            <a:r>
+              <a:t>왼쪽은 MT-InSAR 전체 처리이고 오른쪽은 교면만 다시 고른 것이라, 서로 다른</a:t>
+            </a:r>
+          </a:p>
+          <a:p>
+            <a:r>
+              <a:t>단계입니다. 그래서 점 수도 속도도 다릅니다.</a:t>
+            </a:r>
+          </a:p>
+          <a:p/>
+          <a:p>
+            <a:r>
+              <a:t>※ "계측과 맞춰 봤나" 물으시면 —</a:t>
+            </a:r>
+          </a:p>
+          <a:p>
+            <a:r>
+              <a:t>맞춰 봤습니다. 계측 곡선이 있는 5개소 가운데 올림픽대교에서 R² 0.798 이 나왔고,</a:t>
+            </a:r>
+          </a:p>
+          <a:p>
+            <a:r>
+              <a:t>달을 섞어 2만 번 돌린 우연 기준선 0.607 을 넘습니다. 다만 교면 20점 가운데 그</a:t>
+            </a:r>
+          </a:p>
+          <a:p>
+            <a:r>
+              <a:t>선을 넘은 점이 **1개뿐**이라 아직 일치한다고 주장하지 않습니다. 부족한 것은</a:t>
+            </a:r>
+          </a:p>
+          <a:p>
+            <a:r>
+              <a:t>방법이 아니라 측점의 수라고 보고 있습니다.</a:t>
+            </a:r>
+          </a:p>
+        </p:txBody>
+      </p:sp>
+      <p:sp>
+        <p:nvSpPr>
+          <p:cNvPr id="4" name="Slide Number Placeholder 3"/>
+          <p:cNvSpPr>
+            <a:spLocks noGrp="1"/>
+          </p:cNvSpPr>
+          <p:nvPr>
+            <p:ph type="sldNum" idx="5" sz="quarter"/>
+          </p:nvPr>
+        </p:nvSpPr>
+        <p:spPr/>
+      </p:sp>
+    </p:spTree>
+  </p:cSld>
+  <p:clrMapOvr>
+    <a:masterClrMapping/>
+  </p:clrMapOvr>
+</p:notes>
 </file>
 
 <file path=ppt/slideLayouts/slideLayout1.xml><?xml version="1.0" encoding="utf-8"?>

--- a/docs/KICT_Bmaps_Inframon_연구개발_7p_vF.pptx
+++ b/docs/KICT_Bmaps_Inframon_연구개발_7p_vF.pptx
@@ -583,37 +583,48 @@
               <a:t>[여는 말]</a:t>
             </a:r>
           </a:p>
-          <a:p>
-            <a:r>
-              <a:t>안녕하십니까. 오늘 말씀드릴 것은 위성으로 교량 변위를 재는 플랫폼, Inframon 입니다.</a:t>
-            </a:r>
-          </a:p>
           <a:p/>
           <a:p>
             <a:r>
-              <a:t>한 줄로 말씀드리면 — 계측기가 달리지 않은 교량도 움직임을 재서, KICT B-Maps 에</a:t>
-            </a:r>
-          </a:p>
-          <a:p>
-            <a:r>
-              <a:t>얹자는 이야기입니다.</a:t>
+              <a:t>안녕하십니까. 오늘 말씀드릴 것은 Inframon 이라는 프로그램입니다.</a:t>
             </a:r>
           </a:p>
           <a:p/>
           <a:p>
             <a:r>
-              <a:t>순서는 네 장입니다. 왜 필요한가, 무엇을 목표로 하는가, 지금 무엇을 만들었는가,</a:t>
-            </a:r>
-          </a:p>
-          <a:p>
-            <a:r>
-              <a:t>그리고 앞으로 어떻게 할 것인가.</a:t>
+              <a:t>쉽게 말씀드리면 이렇습니다.</a:t>
+            </a:r>
+          </a:p>
+          <a:p>
+            <a:r>
+              <a:t>지금 센서가 달린 다리는 얼마 되지 않습니다. 센서가 없는 다리는 얼마나 움직이는지</a:t>
+            </a:r>
+          </a:p>
+          <a:p>
+            <a:r>
+              <a:t>아무도 모릅니다. 저희는 그걸 인공위성 사진으로 재려고 합니다.</a:t>
             </a:r>
           </a:p>
           <a:p/>
           <a:p>
             <a:r>
-              <a:t>먼저 왜 필요한지부터 말씀드리겠습니다.</a:t>
+              <a:t>다리에는 아무것도 달지 않습니다. 사람이 나가지도 않습니다.</a:t>
+            </a:r>
+          </a:p>
+          <a:p>
+            <a:r>
+              <a:t>이미 찍혀 있는 위성 사진만으로 잽니다.</a:t>
+            </a:r>
+          </a:p>
+          <a:p/>
+          <a:p>
+            <a:r>
+              <a:t>순서는 네 가지입니다.</a:t>
+            </a:r>
+          </a:p>
+          <a:p>
+            <a:r>
+              <a:t>왜 필요한지, 무엇을 목표로 하는지, 지금 어디까지 만들었는지, 앞으로 어떻게 할지.</a:t>
             </a:r>
           </a:p>
         </p:txBody>
@@ -683,66 +694,72 @@
           <a:lstStyle/>
           <a:p>
             <a:r>
-              <a:t>[문제를 세우는 장]</a:t>
-            </a:r>
-          </a:p>
-          <a:p>
-            <a:r>
-              <a:t>지금 우리는 다리의 일부만, 그것도 가끔만 보고 있습니다.</a:t>
+              <a:t>[왜 필요한가]</a:t>
             </a:r>
           </a:p>
           <a:p/>
           <a:p>
             <a:r>
-              <a:t>센서는 일부 교량의 일부 지점에만 붙어 있습니다. 성수대교와 한강대교조차 처짐</a:t>
-            </a:r>
-          </a:p>
-          <a:p>
-            <a:r>
-              <a:t>센서가 없습니다. 센서가 없는 다리는 점검과 점검 사이가 통째로 빈칸이고,</a:t>
-            </a:r>
-          </a:p>
-          <a:p>
-            <a:r>
-              <a:t>지나간 시간은 되돌려 볼 수 없습니다.</a:t>
+              <a:t>지금은 다리의 일부만, 그것도 가끔만 봅니다.</a:t>
             </a:r>
           </a:p>
           <a:p/>
           <a:p>
             <a:r>
-              <a:t>위성은 그 빈칸을 채웁니다. 같은 자리를 12일마다 다시 찍고, 다리에는 아무것도</a:t>
-            </a:r>
-          </a:p>
-          <a:p>
-            <a:r>
-              <a:t>달지 않으며, 자료는 전량 무상입니다.</a:t>
+              <a:t>센서는 일부 다리에만, 그 다리에서도 일부 지점에만 붙어 있습니다.</a:t>
+            </a:r>
+          </a:p>
+          <a:p>
+            <a:r>
+              <a:t>성수대교와 한강대교에도 처짐 센서가 없습니다.</a:t>
+            </a:r>
+          </a:p>
+          <a:p>
+            <a:r>
+              <a:t>센서가 없으면 점검하는 날에만 압니다. 점검과 점검 사이는 아무도 모릅니다.</a:t>
             </a:r>
           </a:p>
           <a:p/>
           <a:p>
             <a:r>
-              <a:t>★ 여기서 꼭 말할 것 — 2018년 6월까지 거슬러 올라가 다시 볼 수 있다는 점입니다.</a:t>
-            </a:r>
-          </a:p>
-          <a:p>
-            <a:r>
-              <a:t>센서는 단 뒤부터만 보이지만, 위성은 이미 찍어 둔 것이 있습니다. 이게 가장 큰</a:t>
-            </a:r>
-          </a:p>
-          <a:p>
-            <a:r>
-              <a:t>차이입니다.</a:t>
+              <a:t>위성은 다릅니다.</a:t>
+            </a:r>
+          </a:p>
+          <a:p>
+            <a:r>
+              <a:t>같은 자리를 12일마다 다시 찍습니다. 사람이 가지 않아도 저절로 갱신됩니다.</a:t>
+            </a:r>
+          </a:p>
+          <a:p>
+            <a:r>
+              <a:t>다리에는 아무것도 달지 않습니다. 사진값도 들지 않습니다.</a:t>
             </a:r>
           </a:p>
           <a:p/>
           <a:p>
             <a:r>
-              <a:t>아래 표가 그 차이를 정리한 것입니다. 계측기가 있는 교량은 교차검증이 되고,</a:t>
-            </a:r>
-          </a:p>
-          <a:p>
-            <a:r>
-              <a:t>없는 교량은 12일마다 전 구간이 갱신됩니다.</a:t>
+              <a:t>★ 여기가 제일 중요합니다.</a:t>
+            </a:r>
+          </a:p>
+          <a:p>
+            <a:r>
+              <a:t>위성 사진은 2018년부터 이미 쌓여 있습니다.</a:t>
+            </a:r>
+          </a:p>
+          <a:p>
+            <a:r>
+              <a:t>센서는 오늘 달면 오늘부터 보입니다. 위성은 7년 전으로 거슬러 올라가 볼 수 있습니다.</a:t>
+            </a:r>
+          </a:p>
+          <a:p>
+            <a:r>
+              <a:t>"이 다리가 지난 7년 동안 얼마나 움직였나" 를 지금 물어도 답이 나온다는 뜻입니다.</a:t>
+            </a:r>
+          </a:p>
+          <a:p/>
+          <a:p>
+            <a:r>
+              <a:t>아래 표가 그 차이를 정리한 것입니다.</a:t>
             </a:r>
           </a:p>
         </p:txBody>
@@ -812,55 +829,61 @@
           <a:lstStyle/>
           <a:p>
             <a:r>
-              <a:t>[목표를 말하는 장]</a:t>
-            </a:r>
-          </a:p>
-          <a:p>
-            <a:r>
-              <a:t>최종 목표는 계측기가 없는 교량까지 위성으로 상태를 파악하는 체계를 만들고,</a:t>
-            </a:r>
-          </a:p>
-          <a:p>
-            <a:r>
-              <a:t>그것을 B-Maps 에 연계하는 것입니다.</a:t>
+              <a:t>[무엇을 목표로 하는가]</a:t>
             </a:r>
           </a:p>
           <a:p/>
           <a:p>
             <a:r>
-              <a:t>세부 목표는 넷입니다 — 위성 변위 자동 산출, 물리 기반 AI 해석, 교량 디지털 트윈,</a:t>
-            </a:r>
-          </a:p>
-          <a:p>
-            <a:r>
-              <a:t>그리고 B-Maps 연계 서비스.</a:t>
+              <a:t>최종 목표는 한 문장입니다.</a:t>
+            </a:r>
+          </a:p>
+          <a:p>
+            <a:r>
+              <a:t>센서가 없는 다리까지 위성으로 상태를 보고, 그 결과를 B-Maps 에 넣는 것입니다.</a:t>
             </a:r>
           </a:p>
           <a:p/>
           <a:p>
             <a:r>
-              <a:t>★ 표 가운데 칸을 봐 주십시오. '현재 달성' 이 아니라 **'지금 단계'** 라고 적었습니다.</a:t>
-            </a:r>
-          </a:p>
-          <a:p>
-            <a:r>
-              <a:t>개소 수나 비율을 적지 않았습니다. 아직 정확도를 말씀드릴 단계가 아니기 때문입니다.</a:t>
-            </a:r>
-          </a:p>
-          <a:p>
-            <a:r>
-              <a:t>정확도 지표는 계측 대조와 측점 밀도를 확보한 뒤에 내겠습니다.</a:t>
+              <a:t>가는 길은 네 갈래입니다.</a:t>
+            </a:r>
+          </a:p>
+          <a:p>
+            <a:r>
+              <a:t>위성으로 움직임을 재고, AI 로 해석하고, 도면 위에 얹고, B-Maps 에 연결합니다.</a:t>
             </a:r>
           </a:p>
           <a:p/>
           <a:p>
             <a:r>
-              <a:t>CRI 도 '기준 잠정' 이라고 적어 두었습니다. 안전등급이 양호한 교량의 실측값으로</a:t>
-            </a:r>
-          </a:p>
-          <a:p>
-            <a:r>
-              <a:t>기준을 다시 잡아야 확정됩니다. 지금 등급을 구조 상태로 읽으시면 안 됩니다.</a:t>
+              <a:t>★ 표 가운데 칸을 봐 주십시오. 일부러 '지금 단계' 라고 적었습니다.</a:t>
+            </a:r>
+          </a:p>
+          <a:p>
+            <a:r>
+              <a:t>"몇 개소 완료" 같은 숫자를 적지 않았습니다.</a:t>
+            </a:r>
+          </a:p>
+          <a:p>
+            <a:r>
+              <a:t>아직 "얼마나 정확하다" 고 말씀드릴 단계가 아니기 때문입니다.</a:t>
+            </a:r>
+          </a:p>
+          <a:p>
+            <a:r>
+              <a:t>정확도는 현장 계측과 맞춰 본 뒤에 내겠습니다.</a:t>
+            </a:r>
+          </a:p>
+          <a:p/>
+          <a:p>
+            <a:r>
+              <a:t>두 번째 줄의 위험 점수도 '기준 잠정' 이라고 적었습니다.</a:t>
+            </a:r>
+          </a:p>
+          <a:p>
+            <a:r>
+              <a:t>지금 나오는 등급을 다리 상태로 읽으시면 안 됩니다. 기준을 아직 못 정했습니다.</a:t>
             </a:r>
           </a:p>
         </p:txBody>
@@ -930,70 +953,83 @@
           <a:lstStyle/>
           <a:p>
             <a:r>
-              <a:t>[무엇을 만들었는지 — 그리고 못 하는 것]</a:t>
-            </a:r>
-          </a:p>
-          <a:p>
-            <a:r>
-              <a:t>좌표 하나만 넣으면 여섯 단계가 사람 손 없이 돕니다. 영상 고르기, InSAR 처리,</a:t>
-            </a:r>
-          </a:p>
-          <a:p>
-            <a:r>
-              <a:t>교면 측점 정합, PINN 역산, 위험도 평가, 그리고 산출·연동입니다.</a:t>
+              <a:t>[어떻게 만들었는가 — 그리고 못 하는 것]</a:t>
             </a:r>
           </a:p>
           <a:p/>
           <a:p>
             <a:r>
-              <a:t>왼쪽 특징 가운데 '근거 기록' 을 봐 주십시오. 관측 조건과 신뢰구간을 결과에 **항상</a:t>
-            </a:r>
-          </a:p>
-          <a:p>
-            <a:r>
-              <a:t>함께** 남깁니다. 값만 던지면 받는 쪽이 그걸 믿어도 되는지 알 수 없기 때문입니다.</a:t>
+              <a:t>다리 이름과 위·경도만 넣으면 여섯 단계가 사람 손 없이 돕니다.</a:t>
+            </a:r>
+          </a:p>
+          <a:p>
+            <a:r>
+              <a:t>위성 사진을 고르고, 움직임을 뽑고, 다리 위 점만 가려내고,</a:t>
+            </a:r>
+          </a:p>
+          <a:p>
+            <a:r>
+              <a:t>AI 로 해석하고, 위험 점수를 내고, 도면과 B-Maps 로 내보냅니다.</a:t>
             </a:r>
           </a:p>
           <a:p/>
           <a:p>
             <a:r>
-              <a:t>★ 오른쪽은 **저희가 못 하는 것**입니다. 이 자리에서 먼저 말씀드리는 게 맞다고</a:t>
-            </a:r>
-          </a:p>
-          <a:p>
-            <a:r>
-              <a:t>봤습니다.</a:t>
+              <a:t>왼쪽 아래 '근거 기록' 을 봐 주십시오.</a:t>
+            </a:r>
+          </a:p>
+          <a:p>
+            <a:r>
+              <a:t>값만 드리지 않고, 그 값을 얼마나 믿어도 되는지를 **항상 같이** 드립니다.</a:t>
+            </a:r>
+          </a:p>
+          <a:p>
+            <a:r>
+              <a:t>숫자만 받으면 믿어도 되는지 알 수 없기 때문입니다.</a:t>
             </a:r>
           </a:p>
           <a:p/>
           <a:p>
             <a:r>
-              <a:t> · 교면 측점 밀도 — 위성 화소가 지상 5×20 m 인데 상판 폭은 1~2 화소입니다.</a:t>
-            </a:r>
-          </a:p>
-          <a:p>
-            <a:r>
-              <a:t>   프로그램으로 늘릴 수 없습니다. 고해상도 위성이나 코너리플렉터가 답입니다.</a:t>
-            </a:r>
-          </a:p>
-          <a:p>
-            <a:r>
-              <a:t> · 절대 강성 EI — 위성은 상대 변위만 보므로 관측으로 낼 수 없습니다.</a:t>
-            </a:r>
-          </a:p>
-          <a:p>
-            <a:r>
-              <a:t>   지금 값은 설계 제원으로 계산한 것입니다.</a:t>
-            </a:r>
-          </a:p>
-          <a:p>
-            <a:r>
-              <a:t> · 연직 변위 — 한 궤도로는 위성 시선 방향만 나옵니다. 두 궤도를 합쳐야</a:t>
-            </a:r>
-          </a:p>
-          <a:p>
-            <a:r>
-              <a:t>   위아래가 됩니다.</a:t>
+              <a:t>★ 오른쪽은 **저희가 못 하는 것**입니다. 먼저 말씀드리는 게 맞다고 봤습니다.</a:t>
+            </a:r>
+          </a:p>
+          <a:p/>
+          <a:p>
+            <a:r>
+              <a:t>첫째, 다리 위에 잡히는 점이 너무 적습니다.</a:t>
+            </a:r>
+          </a:p>
+          <a:p>
+            <a:r>
+              <a:t>위성 사진 한 칸이 가로 5 m, 세로 20 m 입니다. 다리 상판 폭은 그 한두 칸밖에</a:t>
+            </a:r>
+          </a:p>
+          <a:p>
+            <a:r>
+              <a:t>안 됩니다. 이건 프로그램을 잘 만든다고 늘어나지 않습니다.</a:t>
+            </a:r>
+          </a:p>
+          <a:p/>
+          <a:p>
+            <a:r>
+              <a:t>둘째, 다리가 얼마나 튼튼한지는 위성으로 알 수 없습니다.</a:t>
+            </a:r>
+          </a:p>
+          <a:p>
+            <a:r>
+              <a:t>위성은 "얼마나 움직였나" 만 봅니다. 지금 쓰는 강성 값은 설계도에서 계산한 것입니다.</a:t>
+            </a:r>
+          </a:p>
+          <a:p/>
+          <a:p>
+            <a:r>
+              <a:t>셋째, 위아래로 얼마나 움직였는지는 아직 정확하지 않습니다.</a:t>
+            </a:r>
+          </a:p>
+          <a:p>
+            <a:r>
+              <a:t>위성이 비스듬히 내려다보기 때문입니다. 방향이 다른 위성 둘을 합쳐야 합니다.</a:t>
             </a:r>
           </a:p>
         </p:txBody>
@@ -1063,75 +1099,91 @@
           <a:lstStyle/>
           <a:p>
             <a:r>
-              <a:t>[실증 — 교량마다 같은 것이 나온다]</a:t>
-            </a:r>
-          </a:p>
-          <a:p>
-            <a:r>
-              <a:t>교량마다 같은 산출물과 IFC 트윈이 자동으로 나옵니다. 표는 한강 교량들이고,</a:t>
-            </a:r>
-          </a:p>
-          <a:p>
-            <a:r>
-              <a:t>관측 시점 수와 교면 측점 수가 교량마다 다릅니다.</a:t>
+              <a:t>[다리마다 똑같이 나온다]</a:t>
             </a:r>
           </a:p>
           <a:p/>
           <a:p>
             <a:r>
-              <a:t>★ 여기서 **변위속도를 일부러 빼 두었습니다.** 지금 측점으로 낸 속도는 대부분</a:t>
-            </a:r>
-          </a:p>
-          <a:p>
-            <a:r>
-              <a:t>95 % 구간이 0 을 품습니다. 숫자를 적어 두면 확정된 관측처럼 읽히기 때문에,</a:t>
-            </a:r>
-          </a:p>
-          <a:p>
-            <a:r>
-              <a:t>측점 밀도를 확보한 뒤에 제시하겠습니다. 물어보시면 그대로 말씀드리면 됩니다.</a:t>
+              <a:t>다리가 바뀌어도 같은 결과물이 자동으로 나옵니다. 표가 한강 다리들입니다.</a:t>
+            </a:r>
+          </a:p>
+          <a:p>
+            <a:r>
+              <a:t>관측 횟수와 다리 위에 잡힌 점 개수가 다리마다 다릅니다.</a:t>
             </a:r>
           </a:p>
           <a:p/>
           <a:p>
             <a:r>
-              <a:t>아래는 교량 한 곳당 자동으로 나오는 여섯 가지입니다. 오른쪽 그림이 그중 IFC</a:t>
-            </a:r>
-          </a:p>
-          <a:p>
-            <a:r>
-              <a:t>트윈이고, 점 색이 위성 시선 방향의 변위 속도입니다.</a:t>
+              <a:t>★ 여기서 '얼마나 빨리 움직이는가' 는 **일부러 뺐습니다.**</a:t>
+            </a:r>
+          </a:p>
+          <a:p>
+            <a:r>
+              <a:t>재긴 쟀는데, 오차 범위 안에 0 이 들어 있습니다.</a:t>
+            </a:r>
+          </a:p>
+          <a:p>
+            <a:r>
+              <a:t>"움직였다" 고 말할 수 없다는 뜻입니다.</a:t>
+            </a:r>
+          </a:p>
+          <a:p>
+            <a:r>
+              <a:t>그런 숫자를 표에 적어 두면 확정된 것처럼 읽힙니다.</a:t>
+            </a:r>
+          </a:p>
+          <a:p>
+            <a:r>
+              <a:t>점이 더 잡히면 그때 넣겠습니다.</a:t>
             </a:r>
           </a:p>
           <a:p/>
           <a:p>
             <a:r>
-              <a:t>※ "3D 인데 높이는 정확한가" 물으시면 —</a:t>
-            </a:r>
-          </a:p>
-          <a:p>
-            <a:r>
-              <a:t>높이는 DEM 에 위성이 추정한 잔차고도를 더한 값이고, 그 불확실도가 교량마다</a:t>
-            </a:r>
-          </a:p>
-          <a:p>
-            <a:r>
-              <a:t>7~22 m 입니다. 주탑처럼 30 m 이상 차이 나는 것은 가르지만, 교각·교대는 못</a:t>
-            </a:r>
-          </a:p>
-          <a:p>
-            <a:r>
-              <a:t>가립니다. 그래서 교면은 평면 위치로 고르고, 높이는 검산으로만 씁니다.</a:t>
-            </a:r>
-          </a:p>
-          <a:p>
-            <a:r>
-              <a:t>실제로 그 검산이 일한 적이 있습니다 — 한 교량에서 '교면 위' 점들이 지면보다</a:t>
-            </a:r>
-          </a:p>
-          <a:p>
-            <a:r>
-              <a:t>44 m 낮게 나와, 그게 교면이 아니라 강변 지반임을 잡아냈습니다.</a:t>
+              <a:t>아래는 다리 한 곳당 자동으로 나오는 여섯 가지입니다.</a:t>
+            </a:r>
+          </a:p>
+          <a:p>
+            <a:r>
+              <a:t>오른쪽 그림이 그중 하나 — 도면 위에 위성이 잰 점을 올린 것입니다.</a:t>
+            </a:r>
+          </a:p>
+          <a:p/>
+          <a:p>
+            <a:r>
+              <a:t>※ "3D 인데 높이는 정확한가" 물으시면</a:t>
+            </a:r>
+          </a:p>
+          <a:p>
+            <a:r>
+              <a:t>높이는 위성이 추정한 값이고 오차가 10 m 안팎입니다.</a:t>
+            </a:r>
+          </a:p>
+          <a:p>
+            <a:r>
+              <a:t>주탑처럼 30 m 넘게 차이 나는 것은 구분합니다. 교각처럼 몇 m 차이는 구분 못 합니다.</a:t>
+            </a:r>
+          </a:p>
+          <a:p>
+            <a:r>
+              <a:t>그래서 다리 위 점은 높이가 아니라 **평면 위치**로 고릅니다.</a:t>
+            </a:r>
+          </a:p>
+          <a:p>
+            <a:r>
+              <a:t>높이는 확인용으로만 씁니다.</a:t>
+            </a:r>
+          </a:p>
+          <a:p>
+            <a:r>
+              <a:t>실제로 그 확인이 한 번 일했습니다. 어떤 다리에서 '다리 위' 라고 골라 둔 점들이</a:t>
+            </a:r>
+          </a:p>
+          <a:p>
+            <a:r>
+              <a:t>땅보다 44 m 낮게 나왔습니다. 다리가 아니라 강변 땅을 보고 있었던 겁니다.</a:t>
             </a:r>
           </a:p>
         </p:txBody>
@@ -1201,71 +1253,81 @@
           <a:lstStyle/>
           <a:p>
             <a:r>
-              <a:t>[실제로 돈다 — 그리고 어떻게 붙는가]</a:t>
-            </a:r>
-          </a:p>
-          <a:p>
-            <a:r>
-              <a:t>이건 개념도가 아니라 **실제로 도는 화면**입니다. 성수대교, 관측 101회, 교면 측점</a:t>
-            </a:r>
-          </a:p>
-          <a:p>
-            <a:r>
-              <a:t>103개. 지도에서 점을 하나 누르면 그 자리의 변위 이력이 오른쪽에 뜨고, 아래는</a:t>
-            </a:r>
-          </a:p>
-          <a:p>
-            <a:r>
-              <a:t>위험 지수 추세입니다. CSV 로 바로 내려받습니다.</a:t>
+              <a:t>[실제로 돌아갑니다]</a:t>
             </a:r>
           </a:p>
           <a:p/>
           <a:p>
             <a:r>
-              <a:t>★ 붙이는 방식이 중요합니다. **B-Maps 본체는 한 줄도 고치지 않습니다.**</a:t>
-            </a:r>
-          </a:p>
-          <a:p>
-            <a:r>
-              <a:t>옆에 붙는 조회 전용 프로그램이 교량관리번호로 물어보면 답하는 구조입니다.</a:t>
+              <a:t>이건 개념도가 아니라 **실제로 도는 화면**입니다.</a:t>
+            </a:r>
+          </a:p>
+          <a:p>
+            <a:r>
+              <a:t>성수대교이고, 101번 관측했고, 다리 위에 점이 103개 찍혀 있습니다.</a:t>
+            </a:r>
+          </a:p>
+          <a:p>
+            <a:r>
+              <a:t>지도에서 점을 하나 누르면 그 자리가 지난 7년간 어떻게 움직였는지 오른쪽에 뜹니다.</a:t>
+            </a:r>
+          </a:p>
+          <a:p>
+            <a:r>
+              <a:t>엑셀로 바로 내려받습니다.</a:t>
             </a:r>
           </a:p>
           <a:p/>
           <a:p>
             <a:r>
+              <a:t>★ 붙이는 방식이 중요합니다.</a:t>
+            </a:r>
+          </a:p>
+          <a:p>
+            <a:r>
+              <a:t>**B-Maps 는 한 줄도 고치지 않습니다.**</a:t>
+            </a:r>
+          </a:p>
+          <a:p>
+            <a:r>
+              <a:t>옆에 작은 프로그램을 따로 띄워 두고, B-Maps 가 물어보면 답하는 방식입니다.</a:t>
+            </a:r>
+          </a:p>
+          <a:p/>
+          <a:p>
+            <a:r>
               <a:t>그래서 세 가지가 됩니다.</a:t>
             </a:r>
           </a:p>
           <a:p>
             <a:r>
-              <a:t> · B-Maps 개발팀이 손댈 것이 없습니다.</a:t>
-            </a:r>
-          </a:p>
-          <a:p>
-            <a:r>
-              <a:t> · 저희 쪽이 멈춰도 B-Maps 는 멀쩡합니다. 위성 탭만 비고 나머지는 그대로입니다.</a:t>
-            </a:r>
-          </a:p>
-          <a:p>
-            <a:r>
-              <a:t> · 마음에 안 드시면 그냥 끄시면 됩니다. 저희는 읽기만 하고 쓰지 않습니다.</a:t>
+              <a:t>B-Maps 쪽에서 하실 일이 없습니다.</a:t>
+            </a:r>
+          </a:p>
+          <a:p>
+            <a:r>
+              <a:t>저희 프로그램이 멈춰도 B-Maps 는 멀쩡합니다. 위성 탭만 비고 나머지는 그대로입니다.</a:t>
+            </a:r>
+          </a:p>
+          <a:p>
+            <a:r>
+              <a:t>쓰시다가 아니다 싶으면 그냥 끄시면 됩니다. 저희는 읽기만 하고 쓰지 않습니다.</a:t>
             </a:r>
           </a:p>
           <a:p/>
           <a:p>
             <a:r>
-              <a:t>오른쪽 위는 측점마다 나오는 값 네 가지와 대기 보정입니다.</a:t>
-            </a:r>
-          </a:p>
-          <a:p/>
-          <a:p>
-            <a:r>
-              <a:t>그 아래 '한계' 를 한 번 더 말씀드립니다 — 부족한 것은 방법이 아니라 **교면 측점의</a:t>
-            </a:r>
-          </a:p>
-          <a:p>
-            <a:r>
-              <a:t>수**입니다. 주경간에 코너리플렉터를 놓거나 고해상도 위성을 쓰면 채워집니다.</a:t>
+              <a:t>마지막으로 한계를 한 번 더 말씀드립니다.</a:t>
+            </a:r>
+          </a:p>
+          <a:p>
+            <a:r>
+              <a:t>부족한 것은 방법이 아니라 **다리 위에 잡히는 점의 개수**입니다.</a:t>
+            </a:r>
+          </a:p>
+          <a:p>
+            <a:r>
+              <a:t>다리에 전파를 되쏘는 작은 금속판을 몇 개 달면, 그 자리는 확실히 잡힙니다.</a:t>
             </a:r>
           </a:p>
         </p:txBody>
@@ -1338,88 +1400,102 @@
               <a:t>[앞으로 — 그리고 부탁]</a:t>
             </a:r>
           </a:p>
-          <a:p>
-            <a:r>
-              <a:t>개발·실증은 진행했고, 시범 연동은 협의가 필요하며, 운영·고도화가 남았습니다.</a:t>
-            </a:r>
-          </a:p>
           <a:p/>
           <a:p>
             <a:r>
-              <a:t>운영 단계에서 PINN 이 본격적으로 일합니다 — 성능 평가, 노후도 추정, 앞으로의</a:t>
-            </a:r>
-          </a:p>
-          <a:p>
-            <a:r>
-              <a:t>거동 예측입니다. 지금은 변위를 열·하중·침하·이상으로 나누는 데까지 와 있고,</a:t>
-            </a:r>
-          </a:p>
-          <a:p>
-            <a:r>
-              <a:t>그 나눔이 맞는지 계측으로 검증하는 것이 다음 일입니다.</a:t>
+              <a:t>만드는 것은 했고, 붙이는 것은 협의가 필요하고, 운영은 아직 남았습니다.</a:t>
             </a:r>
           </a:p>
           <a:p/>
           <a:p>
             <a:r>
-              <a:t>★ KICT 께 드리는 요청은 **자료 네 가지뿐**입니다. 새로 만들어 주실 것은 없고,</a:t>
-            </a:r>
-          </a:p>
-          <a:p>
-            <a:r>
-              <a:t>B-Maps 가 이미 들고 계신 것들입니다.</a:t>
+              <a:t>운영 단계에서 AI 가 본격적으로 일합니다.</a:t>
+            </a:r>
+          </a:p>
+          <a:p>
+            <a:r>
+              <a:t>지금은 다리의 움직임을 온도 탓·무게 탓·가라앉음 탓·설명 안 되는 것,</a:t>
+            </a:r>
+          </a:p>
+          <a:p>
+            <a:r>
+              <a:t>이렇게 넷으로 나누는 데까지 왔습니다.</a:t>
+            </a:r>
+          </a:p>
+          <a:p>
+            <a:r>
+              <a:t>앞으로는 그걸로 노후도를 보고, 앞으로 어떻게 될지 내다보려 합니다.</a:t>
             </a:r>
           </a:p>
           <a:p/>
           <a:p>
             <a:r>
-              <a:t> 1 교량 대장 제원 — 연장·폭·경간·형하고. 지금 저희는 공개데이터와 지도로</a:t>
-            </a:r>
-          </a:p>
-          <a:p>
-            <a:r>
-              <a:t>   추정합니다. 교면 측점을 가려내는 폭이 이 값에서 나오므로, 제원이 정확해지면</a:t>
-            </a:r>
-          </a:p>
-          <a:p>
-            <a:r>
-              <a:t>   저희 결과가 **바로** 좋아집니다. 넷 중 이게 제일 급합니다.</a:t>
-            </a:r>
-          </a:p>
-          <a:p>
-            <a:r>
-              <a:t> 2 교량관리번호와 대장 좌표 — 결과를 대장에 붙이는 열쇠입니다.</a:t>
-            </a:r>
-          </a:p>
-          <a:p>
-            <a:r>
-              <a:t> 3 보유하신 IFC 모델 — 있는 교량만이라도. 그러면 저희 트윈이 아니라 B-Maps 의</a:t>
-            </a:r>
-          </a:p>
-          <a:p>
-            <a:r>
-              <a:t>   부재에 값이 바로 붙습니다.</a:t>
-            </a:r>
-          </a:p>
-          <a:p>
-            <a:r>
-              <a:t> 4 준공·보수 이력 — 연도와 일자만. 변위에 계단이 보일 때 보수인지 이상인지</a:t>
-            </a:r>
-          </a:p>
-          <a:p>
-            <a:r>
-              <a:t>   가릅니다.</a:t>
+              <a:t>★ KICT 께 부탁드리는 것은 **자료 네 가지뿐**입니다.</a:t>
+            </a:r>
+          </a:p>
+          <a:p>
+            <a:r>
+              <a:t>새로 만들어 주실 것은 없습니다. 이미 갖고 계신 것들입니다.</a:t>
             </a:r>
           </a:p>
           <a:p/>
           <a:p>
             <a:r>
-              <a:t>맨 아래 — **연동 시연은 지금 바로 가능합니다.** 레지스트리에 교량관리번호만</a:t>
-            </a:r>
-          </a:p>
-          <a:p>
-            <a:r>
-              <a:t>넣어 주시면 그 교량이 B-Maps 탭에 뜹니다.</a:t>
+              <a:t>첫째, 다리 제원입니다 — 길이·폭·경간·높이.</a:t>
+            </a:r>
+          </a:p>
+          <a:p>
+            <a:r>
+              <a:t>지금 저희는 공개 자료와 지도를 보고 **짐작**하고 있습니다.</a:t>
+            </a:r>
+          </a:p>
+          <a:p>
+            <a:r>
+              <a:t>다리 위 점을 가려내는 폭이 바로 이 값에서 나옵니다.</a:t>
+            </a:r>
+          </a:p>
+          <a:p>
+            <a:r>
+              <a:t>제원만 정확해지면 저희 결과가 그 자리에서 좋아집니다. 넷 중 이게 제일 급합니다.</a:t>
+            </a:r>
+          </a:p>
+          <a:p/>
+          <a:p>
+            <a:r>
+              <a:t>둘째, 교량관리번호와 좌표입니다. 결과를 대장에 붙이는 열쇠입니다.</a:t>
+            </a:r>
+          </a:p>
+          <a:p/>
+          <a:p>
+            <a:r>
+              <a:t>셋째, 갖고 계신 도면 파일입니다. 있는 다리만이라도 좋습니다.</a:t>
+            </a:r>
+          </a:p>
+          <a:p/>
+          <a:p>
+            <a:r>
+              <a:t>넷째, 준공·보수 이력입니다. 날짜만 있으면 됩니다.</a:t>
+            </a:r>
+          </a:p>
+          <a:p>
+            <a:r>
+              <a:t>다리가 갑자기 움직인 것이 보일 때, 보수를 해서 그런 것인지 이상이 생긴 것인지</a:t>
+            </a:r>
+          </a:p>
+          <a:p>
+            <a:r>
+              <a:t>가릅니다.</a:t>
+            </a:r>
+          </a:p>
+          <a:p/>
+          <a:p>
+            <a:r>
+              <a:t>맨 아래 — **보여 드리는 것은 지금 바로 됩니다.**</a:t>
+            </a:r>
+          </a:p>
+          <a:p>
+            <a:r>
+              <a:t>다리 번호만 알려 주시면 그 다리가 B-Maps 화면에 뜹니다.</a:t>
             </a:r>
           </a:p>
         </p:txBody>
@@ -1492,83 +1568,110 @@
               <a:t>[부록 — 물으시면 꺼내는 장]</a:t>
             </a:r>
           </a:p>
-          <a:p>
-            <a:r>
-              <a:t>성수대교 한 곳을 끝까지 펴 본 것입니다. 관측 101회, 교면 측점 15점.</a:t>
-            </a:r>
-          </a:p>
           <a:p/>
           <a:p>
             <a:r>
-              <a:t>★ 가장 말씀드리고 싶은 것은 오른쪽 두 번째 줄입니다. **열팽창이 교면과 지반에서</a:t>
-            </a:r>
-          </a:p>
-          <a:p>
-            <a:r>
-              <a:t>갈라집니다** — 교면은 +0.15, 지반은 +0.41 mm/°C 입니다.</a:t>
-            </a:r>
-          </a:p>
-          <a:p>
-            <a:r>
-              <a:t>"교면을 보고 있는 게 맞느냐" 가 이 과제에서 가장 아픈 질문인데, 여기서는 그 답이</a:t>
-            </a:r>
-          </a:p>
-          <a:p>
-            <a:r>
-              <a:t>숫자로 나옵니다. 위성이 다리를 본 것이지 강변 땅을 본 것이 아니라는 뜻입니다.</a:t>
+              <a:t>성수대교 한 곳만 끝까지 펴 본 것입니다. 101번 관측, 다리 위 점 15개.</a:t>
             </a:r>
           </a:p>
           <a:p/>
           <a:p>
             <a:r>
-              <a:t>왼쪽은 처리 쪽입니다. 536점 가운데 시간결맞음 문턱을 넘은 204점을 썼고,</a:t>
-            </a:r>
-          </a:p>
-          <a:p>
-            <a:r>
-              <a:t>대기 보정으로 잔차가 16.3 에서 11.2 mm 로 줄었습니다.</a:t>
+              <a:t>★ 제일 말씀드리고 싶은 것은 오른쪽 두 번째 줄입니다.</a:t>
+            </a:r>
+          </a:p>
+          <a:p>
+            <a:r>
+              <a:t>기온이 오를 때 **다리 위와 강변 땅이 다르게 움직입니다.**</a:t>
+            </a:r>
+          </a:p>
+          <a:p>
+            <a:r>
+              <a:t>다리 위는 1도에 0.15 mm, 강변 땅은 0.41 mm 입니다. 거의 세 배 차이입니다.</a:t>
             </a:r>
           </a:p>
           <a:p/>
           <a:p>
             <a:r>
-              <a:t>※ "두 칸의 점 수가 왜 다른가" 물으시면 —</a:t>
-            </a:r>
-          </a:p>
-          <a:p>
-            <a:r>
-              <a:t>왼쪽은 MT-InSAR 전체 처리이고 오른쪽은 교면만 다시 고른 것이라, 서로 다른</a:t>
-            </a:r>
-          </a:p>
-          <a:p>
-            <a:r>
-              <a:t>단계입니다. 그래서 점 수도 속도도 다릅니다.</a:t>
+              <a:t>이게 왜 중요하냐면, 이 과제에서 제일 아픈 질문이</a:t>
+            </a:r>
+          </a:p>
+          <a:p>
+            <a:r>
+              <a:t>"그거 다리를 본 겁니까, 옆 땅을 본 겁니까" 이기 때문입니다.</a:t>
+            </a:r>
+          </a:p>
+          <a:p>
+            <a:r>
+              <a:t>여기서는 그 답이 숫자로 나옵니다. 다리를 본 것이 맞습니다.</a:t>
             </a:r>
           </a:p>
           <a:p/>
           <a:p>
             <a:r>
-              <a:t>※ "계측과 맞춰 봤나" 물으시면 —</a:t>
-            </a:r>
-          </a:p>
-          <a:p>
-            <a:r>
-              <a:t>맞춰 봤습니다. 계측 곡선이 있는 5개소 가운데 올림픽대교에서 R² 0.798 이 나왔고,</a:t>
-            </a:r>
-          </a:p>
-          <a:p>
-            <a:r>
-              <a:t>달을 섞어 2만 번 돌린 우연 기준선 0.607 을 넘습니다. 다만 교면 20점 가운데 그</a:t>
-            </a:r>
-          </a:p>
-          <a:p>
-            <a:r>
-              <a:t>선을 넘은 점이 **1개뿐**이라 아직 일치한다고 주장하지 않습니다. 부족한 것은</a:t>
-            </a:r>
-          </a:p>
-          <a:p>
-            <a:r>
-              <a:t>방법이 아니라 측점의 수라고 보고 있습니다.</a:t>
+              <a:t>왼쪽은 처리 과정입니다.</a:t>
+            </a:r>
+          </a:p>
+          <a:p>
+            <a:r>
+              <a:t>점 536개 가운데 믿을 만한 204개를 골랐고,</a:t>
+            </a:r>
+          </a:p>
+          <a:p>
+            <a:r>
+              <a:t>공기 때문에 생기는 오차를 걷어내 흔들림이 16 mm 에서 11 mm 로 줄었습니다.</a:t>
+            </a:r>
+          </a:p>
+          <a:p/>
+          <a:p>
+            <a:r>
+              <a:t>※ "양쪽 점 개수가 왜 다른가" 물으시면</a:t>
+            </a:r>
+          </a:p>
+          <a:p>
+            <a:r>
+              <a:t>왼쪽은 다리 주변 전체를 처리한 것이고, 오른쪽은 다리 위만 다시 고른 것입니다.</a:t>
+            </a:r>
+          </a:p>
+          <a:p>
+            <a:r>
+              <a:t>단계가 다릅니다.</a:t>
+            </a:r>
+          </a:p>
+          <a:p/>
+          <a:p>
+            <a:r>
+              <a:t>※ "현장 계측과 맞춰 봤나" 물으시면</a:t>
+            </a:r>
+          </a:p>
+          <a:p>
+            <a:r>
+              <a:t>맞춰 봤습니다. 계측 자료가 있는 다섯 곳 가운데 올림픽대교에서 두 곡선이 꽤 닮게</a:t>
+            </a:r>
+          </a:p>
+          <a:p>
+            <a:r>
+              <a:t>나왔습니다. 닮은 정도를 0 에서 1 사이 점수로 내면 0.80 입니다.</a:t>
+            </a:r>
+          </a:p>
+          <a:p>
+            <a:r>
+              <a:t>그냥 우연히 닮을 수 있는 정도가 0.61 이니, 그보다 높습니다.</a:t>
+            </a:r>
+          </a:p>
+          <a:p>
+            <a:r>
+              <a:t>다만 다리 위 점 20개 가운데 그만큼 닮은 점이 **하나뿐**입니다.</a:t>
+            </a:r>
+          </a:p>
+          <a:p>
+            <a:r>
+              <a:t>그래서 아직 "맞는다" 고 말씀드리지 않습니다.</a:t>
+            </a:r>
+          </a:p>
+          <a:p>
+            <a:r>
+              <a:t>부족한 것은 방법이 아니라 점의 개수라고 보고 있습니다.</a:t>
             </a:r>
           </a:p>
         </p:txBody>
